--- a/content/W04/D4/slides/C2_W04_D04_half2_STUDENT.pptx
+++ b/content/W04/D4/slides/C2_W04_D04_half2_STUDENT.pptx
@@ -1299,7 +1299,7 @@
           </a:p>
           <a:p>
             <a:r>
-              <a:t>model, not the only answer: a group that puts the sale cohort first with a reason that holds has</a:t>
+              <a:t>model, not the only answer: a group that puts the sale-week members first with a reason that holds has</a:t>
             </a:r>
           </a:p>
           <a:p>
@@ -1549,7 +1549,7 @@
           </a:p>
           <a:p>
             <a:r>
-              <a:t>The transfer: a launch cohort is a sale cohort in an AI product.</a:t>
+              <a:t>The transfer: a launch cohort is the sale-week members of an AI product.</a:t>
             </a:r>
           </a:p>
           <a:p>
@@ -7826,7 +7826,7 @@
                 </a:solidFill>
                 <a:latin typeface="Calibri"/>
               </a:rPr>
-              <a:t>The dashboard was flat because of who it counts: every cohort fell, the newest started lower, and the sale cohort is outside the count until October; the orders were lost in one step, on one platform, after one date.</a:t>
+              <a:t>The dashboard was flat because of who it counts: every cohort fell, the newest started lower, and the August cohort is outside the count until October; the orders were lost in one step, on one platform, after one date.</a:t>
             </a:r>
           </a:p>
         </p:txBody>
@@ -11527,7 +11527,7 @@
                 </a:solidFill>
                 <a:latin typeface="Calibri"/>
               </a:rPr>
-              <a:t>the dashboard once the sale cohort enters, if it falls as July's did (32 to 34)</a:t>
+              <a:t>the dashboard once the August cohort enters, if it falls as July's did (32 to 34)</a:t>
             </a:r>
           </a:p>
         </p:txBody>
@@ -11610,7 +11610,7 @@
                 </a:solidFill>
                 <a:latin typeface="Calibri"/>
               </a:rPr>
-              <a:t>The release costs orders every week it stays live, and a code fix ends it. The sale cohort's weakness is already bought; what can still change is the next sale's design.</a:t>
+              <a:t>The release costs orders every week it stays live, and a code fix ends it. The August cohort's weakness is already bought; what can still change is the next sale's design.</a:t>
             </a:r>
           </a:p>
         </p:txBody>
@@ -13251,7 +13251,7 @@
                 </a:solidFill>
                 <a:latin typeface="Calibri"/>
               </a:rPr>
-              <a:t> If the lost carts were mostly retried and ordered later, the release costs friction rather than orders, and the sale cohort would go first.</a:t>
+              <a:t> If the lost carts were mostly retried and ordered later, the release costs friction rather than orders, and the next sale's design would go first.</a:t>
             </a:r>
           </a:p>
         </p:txBody>
@@ -14323,9 +14323,9 @@
                 <a:tableStyleId>{2D5ABB26-0587-4C30-8999-92F81FD0307C}</a:tableStyleId>
               </a:tblPr>
               <a:tblGrid>
-                <a:gridCol w="1639286"/>
-                <a:gridCol w="3440140"/>
-                <a:gridCol w="6051564"/>
+                <a:gridCol w="1610338"/>
+                <a:gridCol w="3575952"/>
+                <a:gridCol w="5944700"/>
               </a:tblGrid>
               <a:tr h="369824">
                 <a:tc>
@@ -14420,7 +14420,7 @@
                           </a:solidFill>
                           <a:latin typeface="Calibri"/>
                         </a:rPr>
-                        <a:t>"It's probably the sale cohort."</a:t>
+                        <a:t>"It's probably the August cohort."</a:t>
                       </a:r>
                     </a:p>
                   </a:txBody>
@@ -14646,7 +14646,7 @@
                           </a:solidFill>
                           <a:latin typeface="Calibri"/>
                         </a:rPr>
-                        <a:t>"One step on Android since 14 September, about 1,317 orders a week; the sale cohort next."</a:t>
+                        <a:t>"One step on Android since 14 September, about 1,317 orders a week; the sale-week members next."</a:t>
                       </a:r>
                     </a:p>
                   </a:txBody>

--- a/content/W04/D4/slides/C2_W04_D04_half2_STUDENT.pptx
+++ b/content/W04/D4/slides/C2_W04_D04_half2_STUDENT.pptx
@@ -1109,17 +1109,27 @@
           </a:p>
           <a:p>
             <a:r>
-              <a:t>would have converted at the old rate; members who retried and ordered later make it an upper</a:t>
-            </a:r>
-          </a:p>
-          <a:p>
-            <a:r>
-              <a:t>bound, which orders per active Android member (1.36 in August, 1.20 in September, against iOS</a:t>
-            </a:r>
-          </a:p>
-          <a:p>
-            <a:r>
-              <a:t>1.34 and 1.40) bear out. Ask which number the membership lead can act on this week.</a:t>
+              <a:t>would have converted at the old rate. If members had retried and ordered later, it would overstate</a:t>
+            </a:r>
+          </a:p>
+          <a:p>
+            <a:r>
+              <a:t>the loss; they did not: after a checkout with no order, the member ordered within a day 36.5</a:t>
+            </a:r>
+          </a:p>
+          <a:p>
+            <a:r>
+              <a:t>percent of the time before the release and 35.1 after. Held to members who joined before August,</a:t>
+            </a:r>
+          </a:p>
+          <a:p>
+            <a:r>
+              <a:t>Android members also ordered less each (1.45 to 1.24 orders per ordering member) while iOS held</a:t>
+            </a:r>
+          </a:p>
+          <a:p>
+            <a:r>
+              <a:t>(1.44 and 1.45). Ask which number the membership lead can act on this week.</a:t>
             </a:r>
           </a:p>
           <a:p>
@@ -1299,12 +1309,12 @@
           </a:p>
           <a:p>
             <a:r>
-              <a:t>model, not the only answer: a group that puts the sale-week members first with a reason that holds has</a:t>
-            </a:r>
-          </a:p>
-          <a:p>
-            <a:r>
-              <a:t>made a defensible call, and the room should hear why.</a:t>
+              <a:t>model, and a group that puts the sale-week members first with a reason that holds has made a</a:t>
+            </a:r>
+          </a:p>
+          <a:p>
+            <a:r>
+              <a:t>defensible call; the room should hear why.</a:t>
             </a:r>
           </a:p>
           <a:p>
@@ -1464,12 +1474,32 @@
           <a:lstStyle/>
           <a:p>
             <a:r>
-              <a:t>LIVE, 6 minutes. The order is Aced's (T2): rule out data issues first, isolate by segment, then</a:t>
-            </a:r>
-          </a:p>
-          <a:p>
-            <a:r>
-              <a:t>separate fewer users from less use per user. The weak answer names a cause in its first sentence.</a:t>
+              <a:t>LIVE, 6 minutes. The steps are the morning's hypothesis board. Aced's guide to analyst interviews</a:t>
+            </a:r>
+          </a:p>
+          <a:p>
+            <a:r>
+              <a:t>says the same about a metric drop: rule out a data issue first, segment before a root cause, and</a:t>
+            </a:r>
+          </a:p>
+          <a:p>
+            <a:r>
+              <a:t>keep fewer users apart from fewer views each (checked 12 October 2026). The weak answer names a</a:t>
+            </a:r>
+          </a:p>
+          <a:p>
+            <a:r>
+              <a:t>cause in its first sentence.</a:t>
+            </a:r>
+          </a:p>
+          <a:p>
+            <a:r>
+              <a:t>Source:</a:t>
+            </a:r>
+          </a:p>
+          <a:p>
+            <a:r>
+              <a:t>https://www.aced.io/blog/top-data-analyst-interview-questions (checked 12 October 2026)</a:t>
             </a:r>
           </a:p>
           <a:p>
@@ -1549,7 +1579,12 @@
           </a:p>
           <a:p>
             <a:r>
-              <a:t>The transfer: a launch cohort is the sale-week members of an AI product.</a:t>
+              <a:t>The transfer: a launch cohort is the sale-week members of an AI product. Two months after launch,</a:t>
+            </a:r>
+          </a:p>
+          <a:p>
+            <a:r>
+              <a:t>the launch cohort and the next few weekly cohorts have all reached week four.</a:t>
             </a:r>
           </a:p>
           <a:p>
@@ -4792,7 +4827,7 @@
         <p:spPr>
           <a:xfrm>
             <a:off x="731519" y="3520440"/>
-            <a:ext cx="9509760" cy="779526"/>
+            <a:ext cx="9509760" cy="1027176"/>
           </a:xfrm>
           <a:prstGeom prst="rect">
             <a:avLst/>
@@ -4813,7 +4848,7 @@
                 </a:solidFill>
                 <a:latin typeface="Calibri"/>
               </a:rPr>
-              <a:t>The morning found two problems, a dashboard that reads 38 because of who it counts and one broken step on Android: which goes first, on what evidence, at what cost, and what does the app team's lead say?</a:t>
+              <a:t>The morning's three chapters found two problems, a dashboard that reads 38 because of who it counts and one broken step on Android; the afternoon's three sections use them and add no new idea. Which problem goes first, on what evidence, at what cost, and what does the app team's lead say?</a:t>
             </a:r>
           </a:p>
         </p:txBody>
@@ -6646,7 +6681,7 @@
                 </a:solidFill>
                 <a:latin typeface="Calibri"/>
               </a:rPr>
-              <a:t>ITEMS 1 TO 4</a:t>
+              <a:t>ITEMS 1, 3 AND 4</a:t>
             </a:r>
           </a:p>
         </p:txBody>
@@ -6716,7 +6751,7 @@
                 </a:solidFill>
                 <a:latin typeface="Calibri"/>
               </a:rPr>
-              <a:t>What a cohort fixes; a blend that holds while cohorts fall; what the dashboard counts; the retention curve's floor</a:t>
+              <a:t>What a cohort fixes; a blend that holds while two old cohorts fall; what a curve's level after month one says</a:t>
             </a:r>
           </a:p>
         </p:txBody>
@@ -6873,7 +6908,7 @@
                 </a:solidFill>
                 <a:latin typeface="Calibri"/>
               </a:rPr>
-              <a:t>ITEMS 5 TO 7</a:t>
+              <a:t>ITEMS 2, 5 AND 7</a:t>
             </a:r>
           </a:p>
         </p:txBody>
@@ -6922,7 +6957,7 @@
         <p:spPr>
           <a:xfrm>
             <a:off x="4502810" y="3303524"/>
-            <a:ext cx="3186074" cy="399796"/>
+            <a:ext cx="3186074" cy="581406"/>
           </a:xfrm>
           <a:prstGeom prst="rect">
             <a:avLst/>
@@ -6943,7 +6978,7 @@
                 </a:solidFill>
                 <a:latin typeface="Calibri"/>
               </a:rPr>
-              <a:t>The step that owns a loss; a step above 100 percent; per session against per member</a:t>
+              <a:t>The step that owns the Android loss; a step above 100 percent; per session against per member</a:t>
             </a:r>
           </a:p>
         </p:txBody>
@@ -7106,7 +7141,7 @@
                 </a:solidFill>
                 <a:latin typeface="Calibri"/>
               </a:rPr>
-              <a:t>ITEM 8</a:t>
+              <a:t>ITEMS 6 AND 8</a:t>
             </a:r>
           </a:p>
         </p:txBody>
@@ -7141,7 +7176,7 @@
                 </a:solidFill>
                 <a:latin typeface="Calibri"/>
               </a:rPr>
-              <a:t>Back to Wednesday</a:t>
+              <a:t>Wednesday, then the interview</a:t>
             </a:r>
           </a:p>
         </p:txBody>
@@ -7155,7 +7190,7 @@
         <p:spPr>
           <a:xfrm>
             <a:off x="8274100" y="3303524"/>
-            <a:ext cx="3186074" cy="399796"/>
+            <a:ext cx="3186074" cy="581406"/>
           </a:xfrm>
           <a:prstGeom prst="rect">
             <a:avLst/>
@@ -7176,7 +7211,7 @@
                 </a:solidFill>
                 <a:latin typeface="Calibri"/>
               </a:rPr>
-              <a:t>Bread to milk, confidence 0.74 and lift 1.04: the verdict in one breath</a:t>
+              <a:t>Bread to milk, confidence 0.74 and lift 1.04, the verdict in one breath; then the first move in a retention walk</a:t>
             </a:r>
           </a:p>
         </p:txBody>
@@ -7826,7 +7861,7 @@
                 </a:solidFill>
                 <a:latin typeface="Calibri"/>
               </a:rPr>
-              <a:t>The dashboard was flat because of who it counts: every cohort fell, the newest started lower, and the August cohort is outside the count until October; the orders were lost in one step, on one platform, after one date.</a:t>
+              <a:t>The dashboard was flat because of who it counts: every cohort fell after month one, each newer one started lower, and the August cohort is outside the count until October, when the dashboard reads about 33; the orders were lost in one step, on one platform, after one date.</a:t>
             </a:r>
           </a:p>
         </p:txBody>
@@ -9692,7 +9727,7 @@
         <p:spPr>
           <a:xfrm>
             <a:off x="530352" y="4276344"/>
-            <a:ext cx="11130991" cy="772160"/>
+            <a:ext cx="11130991" cy="1048512"/>
           </a:xfrm>
           <a:prstGeom prst="rect">
             <a:avLst/>
@@ -9717,7 +9752,7 @@
                 </a:solidFill>
                 <a:latin typeface="Calibri"/>
               </a:rPr>
-              <a:t>Each group writes the five lines for the membership lead on one page, then a second page doing the same for Kalpa's head of Retail-Plus after the lab. Every number comes from the morning's notebooks.</a:t>
+              <a:t>Each group writes the five lines for the membership lead on one page, the fix-first set's page, and then answers its items. After the lab, the Kalpa set's second page asks for the same five lines for Kalpa's head of Retail-Plus. Every number comes from the morning's notebooks.</a:t>
             </a:r>
           </a:p>
         </p:txBody>
@@ -10989,7 +11024,7 @@
         <p:spPr>
           <a:xfrm>
             <a:off x="530352" y="1956816"/>
-            <a:ext cx="2577007" cy="444500"/>
+            <a:ext cx="2577007" cy="317500"/>
           </a:xfrm>
           <a:prstGeom prst="rect">
             <a:avLst/>
@@ -11004,13 +11039,13 @@
           <a:p>
             <a:pPr algn="l"/>
             <a:r>
-              <a:rPr sz="2800" b="0" i="0">
+              <a:rPr sz="2000" b="0" i="0">
                 <a:solidFill>
                   <a:srgbClr val="5B3FD6"/>
                 </a:solidFill>
                 <a:latin typeface="Georgia"/>
               </a:rPr>
-              <a:t>1,317</a:t>
+              <a:t>1,223 to 1,317</a:t>
             </a:r>
           </a:p>
         </p:txBody>
@@ -11023,7 +11058,7 @@
         </p:nvSpPr>
         <p:spPr>
           <a:xfrm>
-            <a:off x="530352" y="2437892"/>
+            <a:off x="530352" y="2310892"/>
             <a:ext cx="2577007" cy="168656"/>
           </a:xfrm>
           <a:prstGeom prst="rect">
@@ -11058,8 +11093,8 @@
         </p:nvSpPr>
         <p:spPr>
           <a:xfrm>
-            <a:off x="530352" y="2639060"/>
-            <a:ext cx="2577007" cy="507111"/>
+            <a:off x="530352" y="2512060"/>
+            <a:ext cx="2577007" cy="663956"/>
           </a:xfrm>
           <a:prstGeom prst="rect">
             <a:avLst/>
@@ -11080,7 +11115,7 @@
                 </a:solidFill>
                 <a:latin typeface="Calibri"/>
               </a:rPr>
-              <a:t>not placed after the release: 22,841 Android member carts in 17 days, at 58 against 44 percent</a:t>
+              <a:t>not placed after the release: 22,841 Android member carts in 17 days at 58 against 44 percent, less the point the comparators lost</a:t>
             </a:r>
           </a:p>
         </p:txBody>
@@ -11138,7 +11173,7 @@
         <p:spPr>
           <a:xfrm>
             <a:off x="3381679" y="1956816"/>
-            <a:ext cx="2577007" cy="444500"/>
+            <a:ext cx="2577007" cy="317500"/>
           </a:xfrm>
           <a:prstGeom prst="rect">
             <a:avLst/>
@@ -11153,13 +11188,13 @@
           <a:p>
             <a:pPr algn="l"/>
             <a:r>
-              <a:rPr sz="2800" b="0" i="0">
+              <a:rPr sz="2000" b="0" i="0">
                 <a:solidFill>
                   <a:srgbClr val="5B3FD6"/>
                 </a:solidFill>
                 <a:latin typeface="Georgia"/>
               </a:rPr>
-              <a:t>Rs 5.3 lakh</a:t>
+              <a:t>Rs 3.7 to 6.6 lakh</a:t>
             </a:r>
           </a:p>
         </p:txBody>
@@ -11172,7 +11207,7 @@
         </p:nvSpPr>
         <p:spPr>
           <a:xfrm>
-            <a:off x="3381679" y="2437892"/>
+            <a:off x="3381679" y="2310892"/>
             <a:ext cx="2577007" cy="168656"/>
           </a:xfrm>
           <a:prstGeom prst="rect">
@@ -11194,7 +11229,7 @@
                 </a:solidFill>
                 <a:latin typeface="Calibri"/>
               </a:rPr>
-              <a:t>OF ORDERS A WEEK</a:t>
+              <a:t>OF ORDER VALUE A WEEK</a:t>
             </a:r>
           </a:p>
         </p:txBody>
@@ -11207,7 +11242,7 @@
         </p:nvSpPr>
         <p:spPr>
           <a:xfrm>
-            <a:off x="3381679" y="2639060"/>
+            <a:off x="3381679" y="2512060"/>
             <a:ext cx="2577007" cy="507111"/>
           </a:xfrm>
           <a:prstGeom prst="rect">
@@ -11229,7 +11264,7 @@
                 </a:solidFill>
                 <a:latin typeface="Calibri"/>
               </a:rPr>
-              <a:t>at Rs 400 an order, an assumption from Rs 300 (Rs 4.0 lakh) to Rs 500 (Rs 6.6 lakh)</a:t>
+              <a:t>at Rs 300 to Rs 500 an order, an assumption; Zomato keeps its commission and fees from it</a:t>
             </a:r>
           </a:p>
         </p:txBody>
@@ -11287,7 +11322,7 @@
         <p:spPr>
           <a:xfrm>
             <a:off x="6233007" y="1956816"/>
-            <a:ext cx="2577007" cy="444500"/>
+            <a:ext cx="2577007" cy="317500"/>
           </a:xfrm>
           <a:prstGeom prst="rect">
             <a:avLst/>
@@ -11302,7 +11337,7 @@
           <a:p>
             <a:pPr algn="l"/>
             <a:r>
-              <a:rPr sz="2800" b="0" i="0">
+              <a:rPr sz="2000" b="0" i="0">
                 <a:solidFill>
                   <a:srgbClr val="5B3FD6"/>
                 </a:solidFill>
@@ -11321,7 +11356,7 @@
         </p:nvSpPr>
         <p:spPr>
           <a:xfrm>
-            <a:off x="6233007" y="2437892"/>
+            <a:off x="6233007" y="2310892"/>
             <a:ext cx="2577007" cy="168656"/>
           </a:xfrm>
           <a:prstGeom prst="rect">
@@ -11356,7 +11391,7 @@
         </p:nvSpPr>
         <p:spPr>
           <a:xfrm>
-            <a:off x="6233007" y="2639060"/>
+            <a:off x="6233007" y="2512060"/>
             <a:ext cx="2577007" cy="350266"/>
           </a:xfrm>
           <a:prstGeom prst="rect">
@@ -11436,7 +11471,7 @@
         <p:spPr>
           <a:xfrm>
             <a:off x="9084335" y="1956816"/>
-            <a:ext cx="2577007" cy="444500"/>
+            <a:ext cx="2577007" cy="317500"/>
           </a:xfrm>
           <a:prstGeom prst="rect">
             <a:avLst/>
@@ -11451,7 +11486,7 @@
           <a:p>
             <a:pPr algn="l"/>
             <a:r>
-              <a:rPr sz="2800" b="0" i="0">
+              <a:rPr sz="2000" b="0" i="0">
                 <a:solidFill>
                   <a:srgbClr val="5B3FD6"/>
                 </a:solidFill>
@@ -11470,7 +11505,7 @@
         </p:nvSpPr>
         <p:spPr>
           <a:xfrm>
-            <a:off x="9084335" y="2437892"/>
+            <a:off x="9084335" y="2310892"/>
             <a:ext cx="2577007" cy="168656"/>
           </a:xfrm>
           <a:prstGeom prst="rect">
@@ -11505,8 +11540,8 @@
         </p:nvSpPr>
         <p:spPr>
           <a:xfrm>
-            <a:off x="9084335" y="2639060"/>
-            <a:ext cx="2577007" cy="350266"/>
+            <a:off x="9084335" y="2512060"/>
+            <a:ext cx="2577007" cy="507111"/>
           </a:xfrm>
           <a:prstGeom prst="rect">
             <a:avLst/>
@@ -11527,7 +11562,7 @@
                 </a:solidFill>
                 <a:latin typeface="Calibri"/>
               </a:rPr>
-              <a:t>the dashboard once the August cohort enters, if it falls as July's did (32 to 34)</a:t>
+              <a:t>the dashboard once the August cohort enters, if it loses July's 10.5 points (32 to 34)</a:t>
             </a:r>
           </a:p>
         </p:txBody>
@@ -11585,7 +11620,7 @@
         <p:spPr>
           <a:xfrm>
             <a:off x="530352" y="3419856"/>
-            <a:ext cx="11130991" cy="772160"/>
+            <a:ext cx="11130991" cy="1048512"/>
           </a:xfrm>
           <a:prstGeom prst="rect">
             <a:avLst/>
@@ -11610,7 +11645,7 @@
                 </a:solidFill>
                 <a:latin typeface="Calibri"/>
               </a:rPr>
-              <a:t>The release costs orders every week it stays live, and a code fix ends it. The August cohort's weakness is already bought; what can still change is the next sale's design.</a:t>
+              <a:t>The release costs orders every week it stays live, and a code fix ends it. The August cohort's discount is already paid for; what can still change is whether the next sale runs, which waits on whether this one's members pay their discount back.</a:t>
             </a:r>
           </a:p>
         </p:txBody>
@@ -12144,7 +12179,7 @@
         </p:blipFill>
         <p:spPr>
           <a:xfrm>
-            <a:off x="1452410" y="1956816"/>
+            <a:off x="1452410" y="1848612"/>
             <a:ext cx="9286875" cy="1371600"/>
           </a:xfrm>
           <a:prstGeom prst="rect">
@@ -12160,7 +12195,7 @@
         </p:nvSpPr>
         <p:spPr>
           <a:xfrm>
-            <a:off x="530352" y="3474720"/>
+            <a:off x="530352" y="3366516"/>
             <a:ext cx="11130991" cy="1121664"/>
           </a:xfrm>
           <a:prstGeom prst="roundRect">
@@ -12214,7 +12249,7 @@
         </p:nvSpPr>
         <p:spPr>
           <a:xfrm>
-            <a:off x="758952" y="3806952"/>
+            <a:off x="758952" y="3698748"/>
             <a:ext cx="457200" cy="457200"/>
           </a:xfrm>
           <a:prstGeom prst="ellipse">
@@ -12266,7 +12301,7 @@
         </p:blipFill>
         <p:spPr>
           <a:xfrm>
-            <a:off x="868680" y="3916680"/>
+            <a:off x="868680" y="3808476"/>
             <a:ext cx="237744" cy="237744"/>
           </a:xfrm>
           <a:prstGeom prst="rect">
@@ -12282,7 +12317,7 @@
         </p:nvSpPr>
         <p:spPr>
           <a:xfrm>
-            <a:off x="1399031" y="3621024"/>
+            <a:off x="1399031" y="3512820"/>
             <a:ext cx="9987991" cy="160401"/>
           </a:xfrm>
           <a:prstGeom prst="rect">
@@ -12317,7 +12352,7 @@
         </p:nvSpPr>
         <p:spPr>
           <a:xfrm>
-            <a:off x="1399031" y="3840480"/>
+            <a:off x="1399031" y="3732276"/>
             <a:ext cx="9987991" cy="682752"/>
           </a:xfrm>
           <a:prstGeom prst="rect">
@@ -12351,8 +12386,8 @@
         </p:nvSpPr>
         <p:spPr>
           <a:xfrm>
-            <a:off x="530352" y="4760976"/>
-            <a:ext cx="11130991" cy="1121664"/>
+            <a:off x="530352" y="4652772"/>
+            <a:ext cx="11130991" cy="1380744"/>
           </a:xfrm>
           <a:prstGeom prst="roundRect">
             <a:avLst>
@@ -12405,7 +12440,7 @@
         </p:nvSpPr>
         <p:spPr>
           <a:xfrm>
-            <a:off x="758952" y="5093208"/>
+            <a:off x="758952" y="5114544"/>
             <a:ext cx="457200" cy="457200"/>
           </a:xfrm>
           <a:prstGeom prst="ellipse">
@@ -12457,7 +12492,7 @@
         </p:blipFill>
         <p:spPr>
           <a:xfrm>
-            <a:off x="868680" y="5202936"/>
+            <a:off x="868680" y="5224272"/>
             <a:ext cx="237744" cy="237744"/>
           </a:xfrm>
           <a:prstGeom prst="rect">
@@ -12473,7 +12508,7 @@
         </p:nvSpPr>
         <p:spPr>
           <a:xfrm>
-            <a:off x="1399031" y="4907280"/>
+            <a:off x="1399031" y="4799076"/>
             <a:ext cx="9987991" cy="160401"/>
           </a:xfrm>
           <a:prstGeom prst="rect">
@@ -12508,8 +12543,8 @@
         </p:nvSpPr>
         <p:spPr>
           <a:xfrm>
-            <a:off x="1399031" y="5126736"/>
-            <a:ext cx="9987991" cy="682752"/>
+            <a:off x="1399031" y="5018532"/>
+            <a:ext cx="9987991" cy="941832"/>
           </a:xfrm>
           <a:prstGeom prst="rect">
             <a:avLst/>
@@ -12529,7 +12564,7 @@
                 </a:solidFill>
                 <a:latin typeface="Calibri"/>
               </a:rPr>
-              <a:t>Judge the next sale on its own cohort curve before buying it, and leave search to menu view alone: its 118 percent was never a broken step.</a:t>
+              <a:t>Before buying another sale, work out what a sale-week member returns over her first months against the discount she was given: at 0.23 orders in month one against 0.61 for an organic member, this sale has not paid back yet. Leave search to menu view alone: its 118 percent was never a broken step.</a:t>
             </a:r>
           </a:p>
         </p:txBody>
@@ -13042,7 +13077,7 @@
                 </a:solidFill>
                 <a:latin typeface="Calibri"/>
               </a:rPr>
-              <a:t>What does a hire-grade call say, in the order the membership lead needs it?</a:t>
+              <a:t>What does a strong call say, in the order the membership lead needs it?</a:t>
             </a:r>
           </a:p>
         </p:txBody>
@@ -13056,7 +13091,7 @@
         <p:spPr>
           <a:xfrm>
             <a:off x="530352" y="1956816"/>
-            <a:ext cx="11130991" cy="2674620"/>
+            <a:ext cx="11130991" cy="2941320"/>
           </a:xfrm>
           <a:prstGeom prst="roundRect">
             <a:avLst>
@@ -13104,7 +13139,7 @@
         <p:spPr>
           <a:xfrm>
             <a:off x="676656" y="2084832"/>
-            <a:ext cx="45720" cy="2418587"/>
+            <a:ext cx="45720" cy="2685288"/>
           </a:xfrm>
           <a:prstGeom prst="roundRect">
             <a:avLst>
@@ -13150,7 +13185,7 @@
         <p:spPr>
           <a:xfrm>
             <a:off x="877824" y="2075688"/>
-            <a:ext cx="10564063" cy="2491739"/>
+            <a:ext cx="10564063" cy="2758440"/>
           </a:xfrm>
           <a:prstGeom prst="rect">
             <a:avLst/>
@@ -13179,7 +13214,7 @@
                 </a:solidFill>
                 <a:latin typeface="Calibri"/>
               </a:rPr>
-              <a:t>Fix the last step of the new Android checkout for members first: it loses about 1,317 orders a week, and a code fix ends the loss. </a:t>
+              <a:t>Fix the last step of the new Android checkout for members first: it loses about 1,223 to 1,317 orders a week, a quarter of Android members' orders, and a code fix ends the loss. </a:t>
             </a:r>
             <a:r>
               <a:rPr sz="1500" b="1" i="0">
@@ -13197,7 +13232,7 @@
                 </a:solidFill>
                 <a:latin typeface="Calibri"/>
               </a:rPr>
-              <a:t> Checkout start to order placed fell from 72.5 to 55 percent for members on Android from the release week; starting checkout held at 80; iOS members (57 to 56) and non-members on Android (52 to 51) held; the fall holds with the cut moved a week either way. </a:t>
+              <a:t> Checkout start to order placed fell from 72.5 to 55 percent for members on Android from the release week; starting checkout held at 80; on the same step iOS members went from 71 to 70 and non-members on Android from 65 to 64; the order records match the event log. </a:t>
             </a:r>
             <a:r>
               <a:rPr sz="1500" b="1" i="0">
@@ -13215,7 +13250,7 @@
                 </a:solidFill>
                 <a:latin typeface="Calibri"/>
               </a:rPr>
-              <a:t> About Rs 5.3 lakh of orders a week at Rs 400 an order, Rs 4.0 to 6.6 lakh across the assumption's range. </a:t>
+              <a:t> Rs 3.7 to 6.6 lakh of order value a week at Rs 300 to Rs 500 an order, of which Zomato keeps its commission and fees. </a:t>
             </a:r>
             <a:r>
               <a:rPr sz="1500" b="1" i="0">
@@ -13233,7 +13268,7 @@
                 </a:solidFill>
                 <a:latin typeface="Calibri"/>
               </a:rPr>
-              <a:t> The sale-week members kept 20 percent in month one against 49 for organic August members; judge the next sale on its own cohort curve before running it. </a:t>
+              <a:t> The sale-week members kept 20 percent in month one against 49 for organic August members; before another sale, work out whether these members pay back their discount. </a:t>
             </a:r>
             <a:r>
               <a:rPr sz="1500" b="1" i="0">
@@ -13251,7 +13286,7 @@
                 </a:solidFill>
                 <a:latin typeface="Calibri"/>
               </a:rPr>
-              <a:t> If the lost carts were mostly retried and ordered later, the release costs friction rather than orders, and the next sale's design would go first.</a:t>
+              <a:t> If members who failed had come back and ordered later, the release would cost a delay rather than orders and the sale would go first; within a day, 36.5 percent did so before the release and 35.1 after.</a:t>
             </a:r>
           </a:p>
         </p:txBody>
@@ -13799,7 +13834,7 @@
                 </a:solidFill>
                 <a:latin typeface="Calibri"/>
               </a:rPr>
-              <a:t>"Retention dropped; walk me through your investigation." How does a hire-grade candidate order it, and how does the same idea apply to an AI product?</a:t>
+              <a:t>"Retention dropped; walk me through your investigation." How does a hire-grade candidate, one whose answer gets the job, order it, and how does the same idea apply to an AI product?</a:t>
             </a:r>
           </a:p>
         </p:txBody>
@@ -14240,7 +14275,7 @@
                 </a:solidFill>
                 <a:latin typeface="Georgia"/>
               </a:rPr>
-              <a:t>The walk: tracking, definition, segments, users, step</a:t>
+              <a:t>The walk: the morning's five causes, then the call</a:t>
             </a:r>
           </a:p>
         </p:txBody>
@@ -14282,7 +14317,7 @@
       </p:sp>
       <p:pic>
         <p:nvPicPr>
-          <p:cNvPr id="9" name="mermaid diagram" descr="b04361b047c2fb8c.png"/>
+          <p:cNvPr id="9" name="mermaid diagram" descr="eb34e4910fc13270.png"/>
           <p:cNvPicPr>
             <a:picLocks noChangeAspect="1"/>
           </p:cNvPicPr>
@@ -14296,8 +14331,8 @@
         </p:blipFill>
         <p:spPr>
           <a:xfrm>
-            <a:off x="530352" y="1956816"/>
-            <a:ext cx="11130991" cy="709151"/>
+            <a:off x="530352" y="1897637"/>
+            <a:ext cx="11130991" cy="882390"/>
           </a:xfrm>
           <a:prstGeom prst="rect">
             <a:avLst/>
@@ -14313,8 +14348,8 @@
           <p:nvPr/>
         </p:nvGraphicFramePr>
         <p:xfrm>
-          <a:off x="530352" y="2812271"/>
-          <a:ext cx="11130990" cy="2574544"/>
+          <a:off x="530352" y="2926331"/>
+          <a:ext cx="11130990" cy="3058160"/>
         </p:xfrm>
         <a:graphic>
           <a:graphicData uri="http://schemas.openxmlformats.org/drawingml/2006/table">
@@ -14521,7 +14556,7 @@
                   </a:tcPr>
                 </a:tc>
               </a:tr>
-              <a:tr h="611632">
+              <a:tr h="853440">
                 <a:tc>
                   <a:txBody>
                     <a:bodyPr/>
@@ -14578,7 +14613,7 @@
                           </a:solidFill>
                           <a:latin typeface="Calibri"/>
                         </a:rPr>
-                        <a:t>Cohort, platform and date, then fewer users against fewer orders each</a:t>
+                        <a:t>Cohorts at the same age, then platform and date on the same step, then fewer users against fewer orders each, cohorts held fixed</a:t>
                       </a:r>
                     </a:p>
                   </a:txBody>
@@ -14589,7 +14624,7 @@
                   </a:tcPr>
                 </a:tc>
               </a:tr>
-              <a:tr h="611632">
+              <a:tr h="853440">
                 <a:tc>
                   <a:txBody>
                     <a:bodyPr/>
@@ -14646,7 +14681,7 @@
                           </a:solidFill>
                           <a:latin typeface="Calibri"/>
                         </a:rPr>
-                        <a:t>"One step on Android since 14 September, about 1,317 orders a week; the sale-week members next."</a:t>
+                        <a:t>"One step on Android since 14 September, about 1,223 to 1,317 orders a week; then whether the sale paid back; October reads about 33."</a:t>
                       </a:r>
                     </a:p>
                   </a:txBody>
@@ -15148,7 +15183,7 @@
         <p:spPr>
           <a:xfrm>
             <a:off x="530352" y="1243584"/>
-            <a:ext cx="11130991" cy="234696"/>
+            <a:ext cx="11130991" cy="218186"/>
           </a:xfrm>
           <a:prstGeom prst="rect">
             <a:avLst/>
@@ -15163,20 +15198,20 @@
           <a:p>
             <a:pPr algn="l"/>
             <a:r>
-              <a:rPr sz="1200" b="0" i="0">
+              <a:rPr sz="1100" b="0" i="0">
                 <a:solidFill>
                   <a:srgbClr val="6B6690"/>
                 </a:solidFill>
                 <a:latin typeface="Calibri"/>
               </a:rPr>
-              <a:t>An AI app's launch week brings its biggest cohort ever. How do you know whether it is habit or novelty?</a:t>
+              <a:t>An AI writing assistant launched two months ago and its launch week brought its biggest cohort ever. How do you know whether it is habit or novelty?</a:t>
             </a:r>
           </a:p>
         </p:txBody>
       </p:sp>
       <p:pic>
         <p:nvPicPr>
-          <p:cNvPr id="9" name="mermaid diagram" descr="5a56a68effa19849.png"/>
+          <p:cNvPr id="9" name="mermaid diagram" descr="e133d57b8616769c.png"/>
           <p:cNvPicPr>
             <a:picLocks noChangeAspect="1"/>
           </p:cNvPicPr>
@@ -15190,8 +15225,8 @@
         </p:blipFill>
         <p:spPr>
           <a:xfrm>
-            <a:off x="530352" y="2741599"/>
-            <a:ext cx="4786326" cy="2398929"/>
+            <a:off x="530352" y="2721020"/>
+            <a:ext cx="4786326" cy="2440087"/>
           </a:xfrm>
           <a:prstGeom prst="rect">
             <a:avLst/>
@@ -15207,8 +15242,8 @@
           <p:nvPr/>
         </p:nvGraphicFramePr>
         <p:xfrm>
-          <a:off x="5761917" y="1798320"/>
-          <a:ext cx="5899424" cy="2688336"/>
+          <a:off x="5761917" y="1795272"/>
+          <a:ext cx="5899424" cy="1627632"/>
         </p:xfrm>
         <a:graphic>
           <a:graphicData uri="http://schemas.openxmlformats.org/drawingml/2006/table">
@@ -15221,7 +15256,7 @@
                 <a:gridCol w="2001288"/>
                 <a:gridCol w="2001288"/>
               </a:tblGrid>
-              <a:tr h="611632">
+              <a:tr h="438912">
                 <a:tc>
                   <a:txBody>
                     <a:bodyPr/>
@@ -15240,7 +15275,7 @@
                     <a:lstStyle/>
                     <a:p>
                       <a:r>
-                        <a:rPr sz="1450" b="1" i="0">
+                        <a:rPr sz="950" b="1" i="0">
                           <a:solidFill>
                             <a:srgbClr val="FFFFFF"/>
                           </a:solidFill>
@@ -15262,7 +15297,7 @@
                     <a:lstStyle/>
                     <a:p>
                       <a:r>
-                        <a:rPr sz="1450" b="1" i="0">
+                        <a:rPr sz="950" b="1" i="0">
                           <a:solidFill>
                             <a:srgbClr val="FFFFFF"/>
                           </a:solidFill>
@@ -15279,14 +15314,14 @@
                   </a:tcPr>
                 </a:tc>
               </a:tr>
-              <a:tr h="611632">
+              <a:tr h="438912">
                 <a:tc>
                   <a:txBody>
                     <a:bodyPr/>
                     <a:lstStyle/>
                     <a:p>
                       <a:r>
-                        <a:rPr sz="1400" b="0" i="0">
+                        <a:rPr sz="900" b="0" i="0">
                           <a:solidFill>
                             <a:srgbClr val="1A1440"/>
                           </a:solidFill>
@@ -15308,7 +15343,7 @@
                     <a:lstStyle/>
                     <a:p>
                       <a:r>
-                        <a:rPr sz="1400" b="0" i="0">
+                        <a:rPr sz="900" b="0" i="0">
                           <a:solidFill>
                             <a:srgbClr val="1A1440"/>
                           </a:solidFill>
@@ -15330,7 +15365,7 @@
                     <a:lstStyle/>
                     <a:p>
                       <a:r>
-                        <a:rPr sz="1400" b="0" i="0">
+                        <a:rPr sz="900" b="0" i="0">
                           <a:solidFill>
                             <a:srgbClr val="1A1440"/>
                           </a:solidFill>
@@ -15347,14 +15382,14 @@
                   </a:tcPr>
                 </a:tc>
               </a:tr>
-              <a:tr h="611632">
+              <a:tr h="310896">
                 <a:tc>
                   <a:txBody>
                     <a:bodyPr/>
                     <a:lstStyle/>
                     <a:p>
                       <a:r>
-                        <a:rPr sz="1400" b="0" i="0">
+                        <a:rPr sz="900" b="0" i="0">
                           <a:solidFill>
                             <a:srgbClr val="1A1440"/>
                           </a:solidFill>
@@ -15376,7 +15411,7 @@
                     <a:lstStyle/>
                     <a:p>
                       <a:r>
-                        <a:rPr sz="1400" b="0" i="0">
+                        <a:rPr sz="900" b="0" i="0">
                           <a:solidFill>
                             <a:srgbClr val="1A1440"/>
                           </a:solidFill>
@@ -15398,7 +15433,7 @@
                     <a:lstStyle/>
                     <a:p>
                       <a:r>
-                        <a:rPr sz="1400" b="0" i="0">
+                        <a:rPr sz="900" b="0" i="0">
                           <a:solidFill>
                             <a:srgbClr val="1A1440"/>
                           </a:solidFill>
@@ -15415,14 +15450,14 @@
                   </a:tcPr>
                 </a:tc>
               </a:tr>
-              <a:tr h="853440">
+              <a:tr h="438912">
                 <a:tc>
                   <a:txBody>
                     <a:bodyPr/>
                     <a:lstStyle/>
                     <a:p>
                       <a:r>
-                        <a:rPr sz="1400" b="0" i="0">
+                        <a:rPr sz="900" b="0" i="0">
                           <a:solidFill>
                             <a:srgbClr val="1A1440"/>
                           </a:solidFill>
@@ -15444,13 +15479,13 @@
                     <a:lstStyle/>
                     <a:p>
                       <a:r>
-                        <a:rPr sz="1400" b="0" i="0">
+                        <a:rPr sz="900" b="0" i="0">
                           <a:solidFill>
                             <a:srgbClr val="1A1440"/>
                           </a:solidFill>
                           <a:latin typeface="Calibri"/>
                         </a:rPr>
-                        <a:t>Climb through the launch and look like recovery later</a:t>
+                        <a:t>Jump in launch week, then stay near the record</a:t>
                       </a:r>
                     </a:p>
                   </a:txBody>
@@ -15466,13 +15501,13 @@
                     <a:lstStyle/>
                     <a:p>
                       <a:r>
-                        <a:rPr sz="1400" b="0" i="0">
+                        <a:rPr sz="900" b="0" i="0">
                           <a:solidFill>
                             <a:srgbClr val="1A1440"/>
                           </a:solidFill>
                           <a:latin typeface="Calibri"/>
                         </a:rPr>
-                        <a:t>Keep arriving and prop the blend</a:t>
+                        <a:t>Each week's new cohort adds to the count</a:t>
                       </a:r>
                     </a:p>
                   </a:txBody>
@@ -15495,8 +15530,8 @@
         </p:nvSpPr>
         <p:spPr>
           <a:xfrm>
-            <a:off x="5761917" y="4742688"/>
-            <a:ext cx="5899425" cy="1341120"/>
+            <a:off x="5761917" y="3678936"/>
+            <a:ext cx="5899425" cy="2407920"/>
           </a:xfrm>
           <a:prstGeom prst="roundRect">
             <a:avLst>
@@ -15543,8 +15578,8 @@
         </p:nvSpPr>
         <p:spPr>
           <a:xfrm>
-            <a:off x="5908221" y="4870704"/>
-            <a:ext cx="45720" cy="1085088"/>
+            <a:off x="5908221" y="3806952"/>
+            <a:ext cx="45720" cy="2151888"/>
           </a:xfrm>
           <a:prstGeom prst="roundRect">
             <a:avLst>
@@ -15589,8 +15624,8 @@
         </p:nvSpPr>
         <p:spPr>
           <a:xfrm>
-            <a:off x="6109389" y="4861560"/>
-            <a:ext cx="5332497" cy="1158240"/>
+            <a:off x="6109389" y="3797808"/>
+            <a:ext cx="5332497" cy="2225040"/>
           </a:xfrm>
           <a:prstGeom prst="rect">
             <a:avLst/>
@@ -15619,7 +15654,7 @@
                 </a:solidFill>
                 <a:latin typeface="Calibri"/>
               </a:rPr>
-              <a:t>Judge each cohort at the age where habit shows, week four or later, and never the blended count of active users, which new cohorts keep propping up. The structure is Chennai's: a mix that hides a fall.</a:t>
+              <a:t>Count a user as active only on the core action, a draft she keeps, and read each cohort at the same age, week four or later (the programme's rule of thumb), with the share of drafts kept and the cost per retained user beside it. The blended count still sizes load and spend; it cannot say whether anyone formed a habit. The structure is Chennai's: a mix that hides a fall.</a:t>
             </a:r>
           </a:p>
         </p:txBody>

--- a/content/W04/D4/slides/C2_W04_D04_half2_STUDENT.pptx
+++ b/content/W04/D4/slides/C2_W04_D04_half2_STUDENT.pptx
@@ -1104,32 +1104,32 @@
           <a:lstStyle/>
           <a:p>
             <a:r>
-              <a:t>LIVE, 4 minutes. Read each number with its assumption. The 1,317 assumes the carts that failed</a:t>
-            </a:r>
-          </a:p>
-          <a:p>
-            <a:r>
-              <a:t>would have converted at the old rate. If members had retried and ordered later, it would overstate</a:t>
-            </a:r>
-          </a:p>
-          <a:p>
-            <a:r>
-              <a:t>the loss; they did not: after a checkout with no order, the member ordered within a day 36.5</a:t>
-            </a:r>
-          </a:p>
-          <a:p>
-            <a:r>
-              <a:t>percent of the time before the release and 35.1 after. Held to members who joined before August,</a:t>
-            </a:r>
-          </a:p>
-          <a:p>
-            <a:r>
-              <a:t>Android members also ordered less each (1.45 to 1.24 orders per ordering member) while iOS held</a:t>
-            </a:r>
-          </a:p>
-          <a:p>
-            <a:r>
-              <a:t>(1.44 and 1.45). Ask which number the membership lead can act on this week.</a:t>
+              <a:t>LIVE, 4 minutes. Read each number with its assumption. The 1,317 assumes no failed cart came back</a:t>
+            </a:r>
+          </a:p>
+          <a:p>
+            <a:r>
+              <a:t>as a later order. Some did: the share of failures followed by an order within a day held near 36</a:t>
+            </a:r>
+          </a:p>
+          <a:p>
+            <a:r>
+              <a:t>percent, but failures nearly doubled (1,921 to 3,386 a week), so recoveries rose from 701 to 1,189 a</a:t>
+            </a:r>
+          </a:p>
+          <a:p>
+            <a:r>
+              <a:t>week. Counted in orders placed, which keeps them, Android members' weekly orders fell 18 percent</a:t>
+            </a:r>
+          </a:p>
+          <a:p>
+            <a:r>
+              <a:t>while iOS members' rose 7: a loss of 1,266 a week against iOS members, 1,133 against non-members on</a:t>
+            </a:r>
+          </a:p>
+          <a:p>
+            <a:r>
+              <a:t>Android. Ask which number the membership lead can act on this week.</a:t>
             </a:r>
           </a:p>
           <a:p>
@@ -11045,7 +11045,7 @@
                 </a:solidFill>
                 <a:latin typeface="Georgia"/>
               </a:rPr>
-              <a:t>1,223 to 1,317</a:t>
+              <a:t>1,133 to 1,317</a:t>
             </a:r>
           </a:p>
         </p:txBody>
@@ -11115,7 +11115,7 @@
                 </a:solidFill>
                 <a:latin typeface="Calibri"/>
               </a:rPr>
-              <a:t>not placed after the release: 22,841 Android member carts in 17 days at 58 against 44 percent, less the point the comparators lost</a:t>
+              <a:t>1,317 from 22,841 carts at 58 against 44 percent if none came back; 1,133 counted in orders placed against non-members on Android</a:t>
             </a:r>
           </a:p>
         </p:txBody>
@@ -11194,7 +11194,7 @@
                 </a:solidFill>
                 <a:latin typeface="Georgia"/>
               </a:rPr>
-              <a:t>Rs 3.7 to 6.6 lakh</a:t>
+              <a:t>Rs 3.4 to 6.6 lakh</a:t>
             </a:r>
           </a:p>
         </p:txBody>
@@ -13091,7 +13091,7 @@
         <p:spPr>
           <a:xfrm>
             <a:off x="530352" y="1956816"/>
-            <a:ext cx="11130991" cy="2941320"/>
+            <a:ext cx="11130991" cy="3208020"/>
           </a:xfrm>
           <a:prstGeom prst="roundRect">
             <a:avLst>
@@ -13139,7 +13139,7 @@
         <p:spPr>
           <a:xfrm>
             <a:off x="676656" y="2084832"/>
-            <a:ext cx="45720" cy="2685288"/>
+            <a:ext cx="45720" cy="2951988"/>
           </a:xfrm>
           <a:prstGeom prst="roundRect">
             <a:avLst>
@@ -13185,7 +13185,7 @@
         <p:spPr>
           <a:xfrm>
             <a:off x="877824" y="2075688"/>
-            <a:ext cx="10564063" cy="2758440"/>
+            <a:ext cx="10564063" cy="3025140"/>
           </a:xfrm>
           <a:prstGeom prst="rect">
             <a:avLst/>
@@ -13214,7 +13214,7 @@
                 </a:solidFill>
                 <a:latin typeface="Calibri"/>
               </a:rPr>
-              <a:t>Fix the last step of the new Android checkout for members first: it loses about 1,223 to 1,317 orders a week, a quarter of Android members' orders, and a code fix ends the loss. </a:t>
+              <a:t>Fix the member path of the new Android checkout first: it loses about 1,133 to 1,317 orders a week, a quarter of Android members' orders, and non-members on the same checkout held, so the fault sits in what only members see. </a:t>
             </a:r>
             <a:r>
               <a:rPr sz="1500" b="1" i="0">
@@ -13250,7 +13250,7 @@
                 </a:solidFill>
                 <a:latin typeface="Calibri"/>
               </a:rPr>
-              <a:t> Rs 3.7 to 6.6 lakh of order value a week at Rs 300 to Rs 500 an order, of which Zomato keeps its commission and fees. </a:t>
+              <a:t> Rs 3.4 to 6.6 lakh of order value a week at Rs 300 to Rs 500 an order, of which Zomato keeps its commission and fees. </a:t>
             </a:r>
             <a:r>
               <a:rPr sz="1500" b="1" i="0">
@@ -13286,7 +13286,7 @@
                 </a:solidFill>
                 <a:latin typeface="Calibri"/>
               </a:rPr>
-              <a:t> If members who failed had come back and ordered later, the release would cost a delay rather than orders and the sale would go first; within a day, 36.5 percent did so before the release and 35.1 after.</a:t>
+              <a:t> If most members who failed had come back and ordered later, the release would cost a delay rather than orders and the sale would go first; counted in orders placed, Android members' weekly orders fell 18 percent while iOS members' rose 7, so most did not.</a:t>
             </a:r>
           </a:p>
         </p:txBody>
@@ -14331,7 +14331,7 @@
         </p:blipFill>
         <p:spPr>
           <a:xfrm>
-            <a:off x="530352" y="1897637"/>
+            <a:off x="530352" y="1956816"/>
             <a:ext cx="11130991" cy="882390"/>
           </a:xfrm>
           <a:prstGeom prst="rect">
@@ -14348,8 +14348,8 @@
           <p:nvPr/>
         </p:nvGraphicFramePr>
         <p:xfrm>
-          <a:off x="530352" y="2926331"/>
-          <a:ext cx="11130990" cy="3058160"/>
+          <a:off x="530352" y="2985510"/>
+          <a:ext cx="11130990" cy="2298192"/>
         </p:xfrm>
         <a:graphic>
           <a:graphicData uri="http://schemas.openxmlformats.org/drawingml/2006/table">
@@ -14358,11 +14358,11 @@
                 <a:tableStyleId>{2D5ABB26-0587-4C30-8999-92F81FD0307C}</a:tableStyleId>
               </a:tblPr>
               <a:tblGrid>
-                <a:gridCol w="1610338"/>
-                <a:gridCol w="3575952"/>
-                <a:gridCol w="5944700"/>
+                <a:gridCol w="1504890"/>
+                <a:gridCol w="3298283"/>
+                <a:gridCol w="6327817"/>
               </a:tblGrid>
-              <a:tr h="369824">
+              <a:tr h="335280">
                 <a:tc>
                   <a:txBody>
                     <a:bodyPr/>
@@ -14381,7 +14381,7 @@
                     <a:lstStyle/>
                     <a:p>
                       <a:r>
-                        <a:rPr sz="1450" b="1" i="0">
+                        <a:rPr sz="1250" b="1" i="0">
                           <a:solidFill>
                             <a:srgbClr val="FFFFFF"/>
                           </a:solidFill>
@@ -14403,7 +14403,7 @@
                     <a:lstStyle/>
                     <a:p>
                       <a:r>
-                        <a:rPr sz="1450" b="1" i="0">
+                        <a:rPr sz="1250" b="1" i="0">
                           <a:solidFill>
                             <a:srgbClr val="FFFFFF"/>
                           </a:solidFill>
@@ -14420,14 +14420,14 @@
                   </a:tcPr>
                 </a:tc>
               </a:tr>
-              <a:tr h="611632">
+              <a:tr h="335280">
                 <a:tc>
                   <a:txBody>
                     <a:bodyPr/>
                     <a:lstStyle/>
                     <a:p>
                       <a:r>
-                        <a:rPr sz="1400" b="0" i="0">
+                        <a:rPr sz="1200" b="0" i="0">
                           <a:solidFill>
                             <a:srgbClr val="1A1440"/>
                           </a:solidFill>
@@ -14449,7 +14449,7 @@
                     <a:lstStyle/>
                     <a:p>
                       <a:r>
-                        <a:rPr sz="1400" b="0" i="0">
+                        <a:rPr sz="1200" b="0" i="0">
                           <a:solidFill>
                             <a:srgbClr val="1A1440"/>
                           </a:solidFill>
@@ -14471,7 +14471,7 @@
                     <a:lstStyle/>
                     <a:p>
                       <a:r>
-                        <a:rPr sz="1400" b="0" i="0">
+                        <a:rPr sz="1200" b="0" i="0">
                           <a:solidFill>
                             <a:srgbClr val="1A1440"/>
                           </a:solidFill>
@@ -14488,14 +14488,14 @@
                   </a:tcPr>
                 </a:tc>
               </a:tr>
-              <a:tr h="369824">
+              <a:tr h="335280">
                 <a:tc>
                   <a:txBody>
                     <a:bodyPr/>
                     <a:lstStyle/>
                     <a:p>
                       <a:r>
-                        <a:rPr sz="1400" b="0" i="0">
+                        <a:rPr sz="1200" b="0" i="0">
                           <a:solidFill>
                             <a:srgbClr val="1A1440"/>
                           </a:solidFill>
@@ -14517,7 +14517,7 @@
                     <a:lstStyle/>
                     <a:p>
                       <a:r>
-                        <a:rPr sz="1400" b="0" i="0">
+                        <a:rPr sz="1200" b="0" i="0">
                           <a:solidFill>
                             <a:srgbClr val="1A1440"/>
                           </a:solidFill>
@@ -14539,7 +14539,7 @@
                     <a:lstStyle/>
                     <a:p>
                       <a:r>
-                        <a:rPr sz="1400" b="0" i="0">
+                        <a:rPr sz="1200" b="0" i="0">
                           <a:solidFill>
                             <a:srgbClr val="1A1440"/>
                           </a:solidFill>
@@ -14556,14 +14556,14 @@
                   </a:tcPr>
                 </a:tc>
               </a:tr>
-              <a:tr h="853440">
+              <a:tr h="542544">
                 <a:tc>
                   <a:txBody>
                     <a:bodyPr/>
                     <a:lstStyle/>
                     <a:p>
                       <a:r>
-                        <a:rPr sz="1400" b="0" i="0">
+                        <a:rPr sz="1200" b="0" i="0">
                           <a:solidFill>
                             <a:srgbClr val="1A1440"/>
                           </a:solidFill>
@@ -14585,7 +14585,7 @@
                     <a:lstStyle/>
                     <a:p>
                       <a:r>
-                        <a:rPr sz="1400" b="0" i="0">
+                        <a:rPr sz="1200" b="0" i="0">
                           <a:solidFill>
                             <a:srgbClr val="1A1440"/>
                           </a:solidFill>
@@ -14607,7 +14607,7 @@
                     <a:lstStyle/>
                     <a:p>
                       <a:r>
-                        <a:rPr sz="1400" b="0" i="0">
+                        <a:rPr sz="1200" b="0" i="0">
                           <a:solidFill>
                             <a:srgbClr val="1A1440"/>
                           </a:solidFill>
@@ -14624,14 +14624,14 @@
                   </a:tcPr>
                 </a:tc>
               </a:tr>
-              <a:tr h="853440">
+              <a:tr h="749808">
                 <a:tc>
                   <a:txBody>
                     <a:bodyPr/>
                     <a:lstStyle/>
                     <a:p>
                       <a:r>
-                        <a:rPr sz="1400" b="0" i="0">
+                        <a:rPr sz="1200" b="0" i="0">
                           <a:solidFill>
                             <a:srgbClr val="1A1440"/>
                           </a:solidFill>
@@ -14653,7 +14653,7 @@
                     <a:lstStyle/>
                     <a:p>
                       <a:r>
-                        <a:rPr sz="1400" b="0" i="0">
+                        <a:rPr sz="1200" b="0" i="0">
                           <a:solidFill>
                             <a:srgbClr val="1A1440"/>
                           </a:solidFill>
@@ -14675,13 +14675,13 @@
                     <a:lstStyle/>
                     <a:p>
                       <a:r>
-                        <a:rPr sz="1400" b="0" i="0">
+                        <a:rPr sz="1200" b="0" i="0">
                           <a:solidFill>
                             <a:srgbClr val="1A1440"/>
                           </a:solidFill>
                           <a:latin typeface="Calibri"/>
                         </a:rPr>
-                        <a:t>"One step on Android since 14 September, about 1,223 to 1,317 orders a week; then whether the sale paid back; October reads about 33."</a:t>
+                        <a:t>"About 3.2 of the 3.6-point fall is the August cohort; the checkout loses 1,133 to 1,317 orders a week that retention cannot see; then whether the sale paid back; October reads about 33."</a:t>
                       </a:r>
                     </a:p>
                   </a:txBody>
@@ -15209,41 +15209,17 @@
           </a:p>
         </p:txBody>
       </p:sp>
-      <p:pic>
-        <p:nvPicPr>
-          <p:cNvPr id="9" name="mermaid diagram" descr="e133d57b8616769c.png"/>
-          <p:cNvPicPr>
-            <a:picLocks noChangeAspect="1"/>
-          </p:cNvPicPr>
-          <p:nvPr/>
-        </p:nvPicPr>
-        <p:blipFill>
-          <a:blip r:embed="rId5"/>
-          <a:stretch>
-            <a:fillRect/>
-          </a:stretch>
-        </p:blipFill>
-        <p:spPr>
-          <a:xfrm>
-            <a:off x="530352" y="2721020"/>
-            <a:ext cx="4786326" cy="2440087"/>
-          </a:xfrm>
-          <a:prstGeom prst="rect">
-            <a:avLst/>
-          </a:prstGeom>
-        </p:spPr>
-      </p:pic>
       <p:graphicFrame>
         <p:nvGraphicFramePr>
-          <p:cNvPr id="10" name="Table 9"/>
+          <p:cNvPr id="9" name="Table 8"/>
           <p:cNvGraphicFramePr>
             <a:graphicFrameLocks noGrp="1"/>
           </p:cNvGraphicFramePr>
           <p:nvPr/>
         </p:nvGraphicFramePr>
         <p:xfrm>
-          <a:off x="5761917" y="1795272"/>
-          <a:ext cx="5899424" cy="1627632"/>
+          <a:off x="530352" y="1682496"/>
+          <a:ext cx="5291175" cy="1627632"/>
         </p:xfrm>
         <a:graphic>
           <a:graphicData uri="http://schemas.openxmlformats.org/drawingml/2006/table">
@@ -15252,11 +15228,11 @@
                 <a:tableStyleId>{2D5ABB26-0587-4C30-8999-92F81FD0307C}</a:tableStyleId>
               </a:tblPr>
               <a:tblGrid>
-                <a:gridCol w="1896848"/>
-                <a:gridCol w="2001288"/>
-                <a:gridCol w="2001288"/>
+                <a:gridCol w="1763725"/>
+                <a:gridCol w="1763725"/>
+                <a:gridCol w="1763725"/>
               </a:tblGrid>
-              <a:tr h="438912">
+              <a:tr h="310896">
                 <a:tc>
                   <a:txBody>
                     <a:bodyPr/>
@@ -15303,7 +15279,7 @@
                           </a:solidFill>
                           <a:latin typeface="Calibri"/>
                         </a:rPr>
-                        <a:t>A cohort that found the app on its own</a:t>
+                        <a:t>A later weekly cohort</a:t>
                       </a:r>
                     </a:p>
                   </a:txBody>
@@ -15382,7 +15358,7 @@
                   </a:tcPr>
                 </a:tc>
               </a:tr>
-              <a:tr h="310896">
+              <a:tr h="438912">
                 <a:tc>
                   <a:txBody>
                     <a:bodyPr/>
@@ -15522,6 +15498,30 @@
           </a:graphicData>
         </a:graphic>
       </p:graphicFrame>
+      <p:pic>
+        <p:nvPicPr>
+          <p:cNvPr id="10" name="mermaid diagram" descr="c0003f6a36f6d20f.png"/>
+          <p:cNvPicPr>
+            <a:picLocks noChangeAspect="1"/>
+          </p:cNvPicPr>
+          <p:nvPr/>
+        </p:nvPicPr>
+        <p:blipFill>
+          <a:blip r:embed="rId5"/>
+          <a:stretch>
+            <a:fillRect/>
+          </a:stretch>
+        </p:blipFill>
+        <p:spPr>
+          <a:xfrm>
+            <a:off x="530352" y="3566160"/>
+            <a:ext cx="5291175" cy="2507040"/>
+          </a:xfrm>
+          <a:prstGeom prst="rect">
+            <a:avLst/>
+          </a:prstGeom>
+        </p:spPr>
+      </p:pic>
       <p:sp>
         <p:nvSpPr>
           <p:cNvPr id="11" name="Rounded Rectangle 10"/>
@@ -15530,8 +15530,8 @@
         </p:nvSpPr>
         <p:spPr>
           <a:xfrm>
-            <a:off x="5761917" y="3678936"/>
-            <a:ext cx="5899425" cy="2407920"/>
+            <a:off x="6370167" y="1682496"/>
+            <a:ext cx="5291175" cy="2941320"/>
           </a:xfrm>
           <a:prstGeom prst="roundRect">
             <a:avLst>
@@ -15578,8 +15578,8 @@
         </p:nvSpPr>
         <p:spPr>
           <a:xfrm>
-            <a:off x="5908221" y="3806952"/>
-            <a:ext cx="45720" cy="2151888"/>
+            <a:off x="6516471" y="1810512"/>
+            <a:ext cx="45720" cy="2685288"/>
           </a:xfrm>
           <a:prstGeom prst="roundRect">
             <a:avLst>
@@ -15624,8 +15624,8 @@
         </p:nvSpPr>
         <p:spPr>
           <a:xfrm>
-            <a:off x="6109389" y="3797808"/>
-            <a:ext cx="5332497" cy="2225040"/>
+            <a:off x="6717639" y="1801368"/>
+            <a:ext cx="4724247" cy="2758440"/>
           </a:xfrm>
           <a:prstGeom prst="rect">
             <a:avLst/>
@@ -15654,7 +15654,7 @@
                 </a:solidFill>
                 <a:latin typeface="Calibri"/>
               </a:rPr>
-              <a:t>Count a user as active only on the core action, a draft she keeps, and read each cohort at the same age, week four or later (the programme's rule of thumb), with the share of drafts kept and the cost per retained user beside it. The blended count still sizes load and spend; it cannot say whether anyone formed a habit. The structure is Chennai's: a mix that hides a fall.</a:t>
+              <a:t>Count a user as active only on the core action, a draft she keeps; check the week's model and pricing changes first; then read each cohort's curve by weeks since signup, week four or later (the programme's rule of thumb). If later cohorts flatten while the launch cohort keeps sliding, the product sticks for the users who came looking. The blended count still sizes load and spend; it cannot say whether anyone formed a habit.</a:t>
             </a:r>
           </a:p>
         </p:txBody>

--- a/content/W04/D4/slides/C2_W04_D04_half2_STUDENT.pptx
+++ b/content/W04/D4/slides/C2_W04_D04_half2_STUDENT.pptx
@@ -539,7 +539,12 @@
           </a:p>
           <a:p>
             <a:r>
-              <a:t>LIVE, 10 minutes. Laptops closed; notebook 08 afterwards or in the lab. Styles: Veritasium (the</a:t>
+              <a:t>LIVE, 10 minutes. Laptops closed; notebook 08 afterwards or in the lab; drill c5 runs in the lab.</a:t>
+            </a:r>
+          </a:p>
+          <a:p>
+            <a:r>
+              <a:t>If late: S70 in one sentence. Styles: Veritasium (the</a:t>
             </a:r>
           </a:p>
           <a:p>
@@ -714,12 +719,17 @@
           <a:lstStyle/>
           <a:p>
             <a:r>
-              <a:t>LIVE, 3 minutes. A learner reads the role card aloud (TRAINER role card); one group answers in</a:t>
-            </a:r>
-          </a:p>
-          <a:p>
-            <a:r>
-              <a:t>the four moves from Tuesday: restate, answer from the evidence, concede what is true, say what</a:t>
+              <a:t>LIVE, 3 minutes. Keep S73 up while the TA, playing the app team's lead from the role card (TRAINER</a:t>
+            </a:r>
+          </a:p>
+          <a:p>
+            <a:r>
+              <a:t>role card), reads the claim; one group answers in the four moves from Tuesday, and only then does</a:t>
+            </a:r>
+          </a:p>
+          <a:p>
+            <a:r>
+              <a:t>this slide, the model answer, go up. The four moves: restate, answer from the evidence, concede what is true, say what</a:t>
             </a:r>
           </a:p>
           <a:p>
@@ -914,12 +924,12 @@
           </a:p>
           <a:p>
             <a:r>
-              <a:t>weaned away more than 4 million unprofitable Instamart users (its Q1 FY27 letter, the fallback</a:t>
-            </a:r>
-          </a:p>
-          <a:p>
-            <a:r>
-              <a:t>block's first part). Then the groups finish their page.</a:t>
+              <a:t>weaned away more than 4 million unprofitable Instamart users (its Q1 FY27 letter; the fallback</a:t>
+            </a:r>
+          </a:p>
+          <a:p>
+            <a:r>
+              <a:t>deck opens on it). Then the groups finish their page.</a:t>
             </a:r>
           </a:p>
           <a:p>
@@ -1089,17 +1099,17 @@
           <a:lstStyle/>
           <a:p>
             <a:r>
-              <a:t>LIVE, 10 minutes. L6. Pairs read the transcript in the extras folder: one plays the interviewer,</a:t>
-            </a:r>
-          </a:p>
-          <a:p>
-            <a:r>
-              <a:t>one the candidate; they score the hire-grade answer on the scorecard's seven lines and swap.</a:t>
-            </a:r>
-          </a:p>
-          <a:p>
-            <a:r>
-              <a:t>Explorer scene Th4 carries the AI-company variant.</a:t>
+              <a:t>LIVE, 10 minutes. L6. Pairs work from S79's table only: one asks the question, one answers in the</a:t>
+            </a:r>
+          </a:p>
+          <a:p>
+            <a:r>
+              <a:t>hire-grade order, and they swap; the full transcript in the extras folder is for the evening. The</a:t>
+            </a:r>
+          </a:p>
+          <a:p>
+            <a:r>
+              <a:t>AI variant is read aloud, 3 minutes, no discussion; explorer scene Th4 carries it.</a:t>
             </a:r>
           </a:p>
           <a:p>
@@ -1249,7 +1259,27 @@
           <a:lstStyle/>
           <a:p>
             <a:r>
-              <a:t>LIVE, 5 minutes. The steps are the morning's hypothesis board. Aced's guide to analyst interviews</a:t>
+              <a:t>LIVE, 5 minutes. Pairs read only this table: one asks, one answers in the hire-grade order, then</a:t>
+            </a:r>
+          </a:p>
+          <a:p>
+            <a:r>
+              <a:t>swap. The 3.6 and the 3.2, worked: counted for everyone, the month read 39.5 in August and 35.9 in</a:t>
+            </a:r>
+          </a:p>
+          <a:p>
+            <a:r>
+              <a:t>September, a fall of 3.6 points; with a normal August cohort, 5,000 members at July's 49 percent in</a:t>
+            </a:r>
+          </a:p>
+          <a:p>
+            <a:r>
+              <a:t>month one, September would read 39.2, a fall of about 0.4, so about 3.2 of the 3.6 is the August</a:t>
+            </a:r>
+          </a:p>
+          <a:p>
+            <a:r>
+              <a:t>cohort. The steps are the morning's hypothesis board. Aced's guide to analyst interviews</a:t>
             </a:r>
           </a:p>
           <a:p>
@@ -1599,7 +1629,12 @@
           <a:lstStyle/>
           <a:p>
             <a:r>
-              <a:t>LIVE, 15 minutes. The map (1), the Kahoot (10) and the close (4).</a:t>
+              <a:t>LIVE, 15 minutes. The two questions (1), the Kahoot (10) and the close (4). If late: the close</a:t>
+            </a:r>
+          </a:p>
+          <a:p>
+            <a:r>
+              <a:t>keeps the sentence and Friday's ticket.</a:t>
             </a:r>
           </a:p>
           <a:p>
@@ -2399,7 +2434,17 @@
           <a:lstStyle/>
           <a:p>
             <a:r>
-              <a:t>LIVE, 25 minutes, unguided, in the nine groups. L5. Styles: the case method (the app team's lead</a:t>
+              <a:t>LIVE, 25 minutes, unguided, in the nine groups: 12 minutes of slides and 13 of writing; the set's</a:t>
+            </a:r>
+          </a:p>
+          <a:p>
+            <a:r>
+              <a:t>items run in the lab. Hand out: the fix-first set and the role card to the TA. If late: S76 in one</a:t>
+            </a:r>
+          </a:p>
+          <a:p>
+            <a:r>
+              <a:t>sentence. L5. Styles: the case method (the app team's lead</a:t>
             </a:r>
           </a:p>
           <a:p>
@@ -10529,7 +10574,7 @@
                 </a:solidFill>
                 <a:latin typeface="Calibri"/>
               </a:rPr>
-              <a:t>Before buying another sale, set what a sale-week member returns against her discount: 0.23 orders in month one against 0.61 for an organic member, so this sale has not paid back. Leave search to menu view alone: 118 percent was never a broken step.</a:t>
+              <a:t>Before another sale, set a sale-week member's 0.23 orders in month one, against an organic member's 0.61, beside her discount and the margin; until then the payback is open. Leave search to menu view alone: 118 was never a broken step.</a:t>
             </a:r>
           </a:p>
         </p:txBody>
@@ -11135,7 +11180,7 @@
         <p:spPr>
           <a:xfrm>
             <a:off x="530352" y="1956816"/>
-            <a:ext cx="11130991" cy="3208020"/>
+            <a:ext cx="11130991" cy="3741420"/>
           </a:xfrm>
           <a:prstGeom prst="roundRect">
             <a:avLst>
@@ -11183,7 +11228,7 @@
         <p:spPr>
           <a:xfrm>
             <a:off x="676656" y="2084832"/>
-            <a:ext cx="45720" cy="2951988"/>
+            <a:ext cx="45720" cy="3485388"/>
           </a:xfrm>
           <a:prstGeom prst="roundRect">
             <a:avLst>
@@ -11229,7 +11274,7 @@
         <p:spPr>
           <a:xfrm>
             <a:off x="877824" y="2075688"/>
-            <a:ext cx="10564063" cy="3025140"/>
+            <a:ext cx="10564063" cy="3558540"/>
           </a:xfrm>
           <a:prstGeom prst="rect">
             <a:avLst/>
@@ -11258,7 +11303,7 @@
                 </a:solidFill>
                 <a:latin typeface="Calibri"/>
               </a:rPr>
-              <a:t>Fix the member path of the new Android checkout first: it loses about 1,133 to 1,317 orders a week, a quarter of Android members' orders, and non-members on the same checkout held, so the fault sits in what only members see. </a:t>
+              <a:t>Fix the member path of the new Android checkout first: it loses about 1,133 to 1,317 orders a week, a quarter of Android members' orders, and non-members on the same checkout held, so the fault sits in what only members see. Until the fix ships, switch Android members back to the old checkout today, or give half of them the old path for two days, which confirms the cause and stops most of the loss. </a:t>
             </a:r>
             <a:r>
               <a:rPr sz="1500" b="1" i="0">
@@ -14282,7 +14327,7 @@
                           </a:solidFill>
                           <a:latin typeface="Calibri"/>
                         </a:rPr>
-                        <a:t>"About 3.2 of the 3.6-point fall is the August cohort; the checkout loses 1,133 to 1,317 orders a week that retention cannot see; then whether the sale paid back; October reads about 33."</a:t>
+                        <a:t>"About 3.2 of the 3.6-point fall is the August cohort; the checkout loses 1,133 to 1,317 orders a week that retention cannot see; then whether the sale pays back; October reads about 33 on one assumption."</a:t>
                       </a:r>
                     </a:p>
                   </a:txBody>
@@ -15940,7 +15985,7 @@
         <p:spPr>
           <a:xfrm>
             <a:off x="530352" y="1956816"/>
-            <a:ext cx="11130991" cy="1074420"/>
+            <a:ext cx="11130991" cy="1341120"/>
           </a:xfrm>
           <a:prstGeom prst="roundRect">
             <a:avLst>
@@ -15988,7 +16033,7 @@
         <p:spPr>
           <a:xfrm>
             <a:off x="676656" y="2084832"/>
-            <a:ext cx="45720" cy="818388"/>
+            <a:ext cx="45720" cy="1085088"/>
           </a:xfrm>
           <a:prstGeom prst="roundRect">
             <a:avLst>
@@ -16034,7 +16079,7 @@
         <p:spPr>
           <a:xfrm>
             <a:off x="877824" y="2075688"/>
-            <a:ext cx="10564063" cy="891540"/>
+            <a:ext cx="10564063" cy="1158240"/>
           </a:xfrm>
           <a:prstGeom prst="rect">
             <a:avLst/>
@@ -16063,7 +16108,7 @@
                 </a:solidFill>
                 <a:latin typeface="Calibri"/>
               </a:rPr>
-              <a:t>"Your cohort table treats a member who has not left yet as if she were retained for ever, and that flatters every curve. The next 120 minutes give that member a name, censored, and show when two curves really differ by more than chance."</a:t>
+              <a:t>"Your table leaves a young cohort's later ages empty, and a member who has not left yet has no end date. Treat her as retained for ever and every curve looks better than it is. After the close, the faculty session (tentative) gives that member a name, censored, and shows when two curves really differ by more than chance."</a:t>
             </a:r>
           </a:p>
         </p:txBody>
@@ -16076,7 +16121,7 @@
         </p:nvSpPr>
         <p:spPr>
           <a:xfrm>
-            <a:off x="530352" y="3195828"/>
+            <a:off x="530352" y="3462528"/>
             <a:ext cx="11130991" cy="772160"/>
           </a:xfrm>
           <a:prstGeom prst="rect">
@@ -19407,7 +19452,7 @@
                 </a:solidFill>
                 <a:latin typeface="Calibri"/>
               </a:rPr>
-              <a:t>One Kahoot item per topic, and Wednesday's return question</a:t>
+              <a:t>At least one Kahoot item per topic, and Wednesday's return question</a:t>
             </a:r>
           </a:p>
         </p:txBody>
@@ -20895,7 +20940,7 @@
                 </a:solidFill>
                 <a:latin typeface="Calibri"/>
               </a:rPr>
-              <a:t>The first move in a retention walk; then bread to milk, confidence 0.74 and lift 1.04, the verdict in one breath</a:t>
+              <a:t>Which of Gold's two problems goes first, and why; then bread to milk, confidence 0.74 and lift 1.04, the verdict in one breath</a:t>
             </a:r>
           </a:p>
         </p:txBody>
@@ -21624,7 +21669,7 @@
                 </a:solidFill>
                 <a:latin typeface="Calibri"/>
               </a:rPr>
-              <a:t>The dashboard was flat because of who it counts: every cohort fell after month one, each newer one started lower, and the August cohort is outside the count until October, when the dashboard reads about 33; the orders were lost in one step, on one platform, after one date.</a:t>
+              <a:t>The dashboard was flat because of who it counts: every cohort fell after month one, each newer one started lower, and the August cohort is outside the count until October, when the dashboard, on one assumption, reads about 33; the orders were lost in one step, on one platform, after one date.</a:t>
             </a:r>
           </a:p>
         </p:txBody>
@@ -21761,7 +21806,7 @@
                 </a:solidFill>
                 <a:latin typeface="Calibri"/>
               </a:rPr>
-              <a:t>A cohort fixes the entry moment. A curve's floor is read only once two ages agree. A blend is a size-weighted average and counts who it counts. Each funnel step divides by the step before, in one named unit. A low step is not a loss until it moves, and a fix-first call carries its comparator, its date and its cost.</a:t>
+              <a:t>A cohort fixes the entry moment. A curve's floor, by our rule, is read only once two ages agree within a point. A blend is a size-weighted average and counts who it counts. Each funnel step divides by the step before, in one named unit. When the overall falls, the step that moved owns the fall, and a fix-first call carries its comparator, its date and its cost.</a:t>
             </a:r>
           </a:p>
         </p:txBody>
@@ -22490,7 +22535,7 @@
                 </a:solidFill>
                 <a:latin typeface="Calibri"/>
               </a:rPr>
-              <a:t>The dean has two problems: 200 of 1,000 applications skip the entrance test every cycle, and offer acceptance fell from 90 to 75 percent this cycle (invented). Which goes first?</a:t>
+              <a:t>The dean has two problems: 200 of 1,000 applications never sat the entrance test this cycle, the same 20 percent as every cycle, and offer acceptance fell from 90 to 75 percent (invented). Which goes first?</a:t>
             </a:r>
           </a:p>
         </p:txBody>
@@ -23488,8 +23533,8 @@
         </p:blipFill>
         <p:spPr>
           <a:xfrm>
-            <a:off x="2687132" y="1664208"/>
-            <a:ext cx="6817429" cy="2939287"/>
+            <a:off x="3007620" y="1664208"/>
+            <a:ext cx="6176454" cy="2662936"/>
           </a:xfrm>
           <a:prstGeom prst="rect">
             <a:avLst/>
@@ -23504,7 +23549,7 @@
         </p:nvSpPr>
         <p:spPr>
           <a:xfrm>
-            <a:off x="530352" y="4640072"/>
+            <a:off x="530352" y="4363720"/>
             <a:ext cx="11130991" cy="316992"/>
           </a:xfrm>
           <a:prstGeom prst="rect">
@@ -23539,8 +23584,8 @@
         </p:nvSpPr>
         <p:spPr>
           <a:xfrm>
-            <a:off x="530352" y="4966208"/>
-            <a:ext cx="11130991" cy="1233424"/>
+            <a:off x="530352" y="4689856"/>
+            <a:ext cx="11130991" cy="1509775"/>
           </a:xfrm>
           <a:prstGeom prst="rect">
             <a:avLst/>
@@ -23560,7 +23605,7 @@
                 </a:solidFill>
                 <a:latin typeface="Calibri"/>
               </a:rPr>
-              <a:t>The answer is c. The test's no-show has read 20 percent for three cycles, so it is how the test runs, and nothing changed there. Acceptance fell for one group: students from other states went from 87 to 50 percent, from the cycle the fee-payment deadline was cut from 21 to 7 days after the offer, while in-state students, the comparator on the same step, held at 92 to 90.</a:t>
+              <a:t>The answer is c. The test's no-show has read 20 percent for three cycles, so it is how the test runs, and nothing changed there. Acceptance fell for one group: students from other states went from 87 to 50 percent, from the cycle the fee-payment deadline was cut from 21 to 7 days after the offer, while in-state students on the same step, who met the same shorter deadline, held at 92 to 90: the comparator places the fall in one group, and the date ties it to the change.</a:t>
             </a:r>
           </a:p>
         </p:txBody>
@@ -24166,8 +24211,8 @@
           <p:nvPr/>
         </p:nvGraphicFramePr>
         <p:xfrm>
-          <a:off x="530352" y="1905508"/>
-          <a:ext cx="11130990" cy="1676400"/>
+          <a:off x="530352" y="1812544"/>
+          <a:ext cx="11130991" cy="1554480"/>
         </p:xfrm>
         <a:graphic>
           <a:graphicData uri="http://schemas.openxmlformats.org/drawingml/2006/table">
@@ -24176,19 +24221,19 @@
                 <a:tableStyleId>{2D5ABB26-0587-4C30-8999-92F81FD0307C}</a:tableStyleId>
               </a:tblPr>
               <a:tblGrid>
-                <a:gridCol w="6538934"/>
-                <a:gridCol w="1357987"/>
-                <a:gridCol w="1876082"/>
-                <a:gridCol w="1357987"/>
+                <a:gridCol w="7189490"/>
+                <a:gridCol w="914400"/>
+                <a:gridCol w="2112701"/>
+                <a:gridCol w="914400"/>
               </a:tblGrid>
-              <a:tr h="335280">
+              <a:tr h="310896">
                 <a:tc>
                   <a:txBody>
                     <a:bodyPr/>
                     <a:lstStyle/>
                     <a:p>
                       <a:r>
-                        <a:rPr sz="1250" b="1" i="0">
+                        <a:rPr sz="1050" b="1" i="0">
                           <a:solidFill>
                             <a:srgbClr val="FFFFFF"/>
                           </a:solidFill>
@@ -24210,7 +24255,7 @@
                     <a:lstStyle/>
                     <a:p>
                       <a:r>
-                        <a:rPr sz="1250" b="1" i="0">
+                        <a:rPr sz="1050" b="1" i="0">
                           <a:solidFill>
                             <a:srgbClr val="FFFFFF"/>
                           </a:solidFill>
@@ -24232,7 +24277,7 @@
                     <a:lstStyle/>
                     <a:p>
                       <a:r>
-                        <a:rPr sz="1250" b="1" i="0">
+                        <a:rPr sz="1050" b="1" i="0">
                           <a:solidFill>
                             <a:srgbClr val="FFFFFF"/>
                           </a:solidFill>
@@ -24254,7 +24299,7 @@
                     <a:lstStyle/>
                     <a:p>
                       <a:r>
-                        <a:rPr sz="1250" b="1" i="0">
+                        <a:rPr sz="1050" b="1" i="0">
                           <a:solidFill>
                             <a:srgbClr val="FFFFFF"/>
                           </a:solidFill>
@@ -24271,14 +24316,14 @@
                   </a:tcPr>
                 </a:tc>
               </a:tr>
-              <a:tr h="335280">
+              <a:tr h="310896">
                 <a:tc>
                   <a:txBody>
                     <a:bodyPr/>
                     <a:lstStyle/>
                     <a:p>
                       <a:r>
-                        <a:rPr sz="1200" b="0" i="0">
+                        <a:rPr sz="1000" b="0" i="0">
                           <a:solidFill>
                             <a:srgbClr val="1A1440"/>
                           </a:solidFill>
@@ -24300,7 +24345,7 @@
                     <a:lstStyle/>
                     <a:p>
                       <a:r>
-                        <a:rPr sz="1200" b="0" i="0">
+                        <a:rPr sz="1000" b="0" i="0">
                           <a:solidFill>
                             <a:srgbClr val="1A1440"/>
                           </a:solidFill>
@@ -24322,7 +24367,7 @@
                     <a:lstStyle/>
                     <a:p>
                       <a:r>
-                        <a:rPr sz="1200" b="0" i="0">
+                        <a:rPr sz="1000" b="0" i="0">
                           <a:solidFill>
                             <a:srgbClr val="1A1440"/>
                           </a:solidFill>
@@ -24344,7 +24389,7 @@
                     <a:lstStyle/>
                     <a:p>
                       <a:r>
-                        <a:rPr sz="1200" b="0" i="0">
+                        <a:rPr sz="1000" b="0" i="0">
                           <a:solidFill>
                             <a:srgbClr val="1A1440"/>
                           </a:solidFill>
@@ -24361,14 +24406,14 @@
                   </a:tcPr>
                 </a:tc>
               </a:tr>
-              <a:tr h="335280">
+              <a:tr h="310896">
                 <a:tc>
                   <a:txBody>
                     <a:bodyPr/>
                     <a:lstStyle/>
                     <a:p>
                       <a:r>
-                        <a:rPr sz="1200" b="0" i="0">
+                        <a:rPr sz="1000" b="0" i="0">
                           <a:solidFill>
                             <a:srgbClr val="1A1440"/>
                           </a:solidFill>
@@ -24390,7 +24435,7 @@
                     <a:lstStyle/>
                     <a:p>
                       <a:r>
-                        <a:rPr sz="1200" b="0" i="0">
+                        <a:rPr sz="1000" b="0" i="0">
                           <a:solidFill>
                             <a:srgbClr val="1A1440"/>
                           </a:solidFill>
@@ -24412,7 +24457,7 @@
                     <a:lstStyle/>
                     <a:p>
                       <a:r>
-                        <a:rPr sz="1200" b="0" i="0">
+                        <a:rPr sz="1000" b="0" i="0">
                           <a:solidFill>
                             <a:srgbClr val="1A1440"/>
                           </a:solidFill>
@@ -24434,7 +24479,7 @@
                     <a:lstStyle/>
                     <a:p>
                       <a:r>
-                        <a:rPr sz="1200" b="0" i="0">
+                        <a:rPr sz="1000" b="0" i="0">
                           <a:solidFill>
                             <a:srgbClr val="1A1440"/>
                           </a:solidFill>
@@ -24451,14 +24496,14 @@
                   </a:tcPr>
                 </a:tc>
               </a:tr>
-              <a:tr h="335280">
+              <a:tr h="310896">
                 <a:tc>
                   <a:txBody>
                     <a:bodyPr/>
                     <a:lstStyle/>
                     <a:p>
                       <a:r>
-                        <a:rPr sz="1200" b="0" i="0">
+                        <a:rPr sz="1000" b="0" i="0">
                           <a:solidFill>
                             <a:srgbClr val="1A1440"/>
                           </a:solidFill>
@@ -24480,7 +24525,7 @@
                     <a:lstStyle/>
                     <a:p>
                       <a:r>
-                        <a:rPr sz="1200" b="0" i="0">
+                        <a:rPr sz="1000" b="0" i="0">
                           <a:solidFill>
                             <a:srgbClr val="1A1440"/>
                           </a:solidFill>
@@ -24502,7 +24547,7 @@
                     <a:lstStyle/>
                     <a:p>
                       <a:r>
-                        <a:rPr sz="1200" b="0" i="0">
+                        <a:rPr sz="1000" b="0" i="0">
                           <a:solidFill>
                             <a:srgbClr val="1A1440"/>
                           </a:solidFill>
@@ -24524,7 +24569,7 @@
                     <a:lstStyle/>
                     <a:p>
                       <a:r>
-                        <a:rPr sz="1200" b="0" i="0">
+                        <a:rPr sz="1000" b="0" i="0">
                           <a:solidFill>
                             <a:srgbClr val="1A1440"/>
                           </a:solidFill>
@@ -24541,14 +24586,14 @@
                   </a:tcPr>
                 </a:tc>
               </a:tr>
-              <a:tr h="335280">
+              <a:tr h="310896">
                 <a:tc>
                   <a:txBody>
                     <a:bodyPr/>
                     <a:lstStyle/>
                     <a:p>
                       <a:r>
-                        <a:rPr sz="1200" b="0" i="0">
+                        <a:rPr sz="1000" b="0" i="0">
                           <a:solidFill>
                             <a:srgbClr val="1A1440"/>
                           </a:solidFill>
@@ -24570,7 +24615,7 @@
                     <a:lstStyle/>
                     <a:p>
                       <a:r>
-                        <a:rPr sz="1200" b="0" i="0">
+                        <a:rPr sz="1000" b="0" i="0">
                           <a:solidFill>
                             <a:srgbClr val="1A1440"/>
                           </a:solidFill>
@@ -24592,7 +24637,7 @@
                     <a:lstStyle/>
                     <a:p>
                       <a:r>
-                        <a:rPr sz="1200" b="0" i="0">
+                        <a:rPr sz="1000" b="0" i="0">
                           <a:solidFill>
                             <a:srgbClr val="1A1440"/>
                           </a:solidFill>
@@ -24614,7 +24659,7 @@
                     <a:lstStyle/>
                     <a:p>
                       <a:r>
-                        <a:rPr sz="1200" b="0" i="0">
+                        <a:rPr sz="1000" b="0" i="0">
                           <a:solidFill>
                             <a:srgbClr val="1A1440"/>
                           </a:solidFill>
@@ -24643,8 +24688,8 @@
         </p:nvSpPr>
         <p:spPr>
           <a:xfrm>
-            <a:off x="530352" y="3837940"/>
-            <a:ext cx="11130991" cy="1048512"/>
+            <a:off x="530352" y="3623056"/>
+            <a:ext cx="11130991" cy="1428496"/>
           </a:xfrm>
           <a:prstGeom prst="rect">
             <a:avLst/>
@@ -24659,17 +24704,17 @@
           <a:p>
             <a:pPr>
               <a:spcAft>
-                <a:spcPts val="800"/>
+                <a:spcPts val="700"/>
               </a:spcAft>
             </a:pPr>
             <a:r>
-              <a:rPr sz="1600" b="0" i="0">
+              <a:rPr sz="1400" b="0" i="0">
                 <a:solidFill>
                   <a:srgbClr val="1A1440"/>
                 </a:solidFill>
                 <a:latin typeface="Calibri"/>
               </a:rPr>
-              <a:t>Since 80 percent of those who accept join, 60 fewer acceptances are 48 fewer students, and the joiners counted directly say the same: 288 last cycle, 240 this cycle. At a first-year fee of Rs 1 to 1.5 lakh, an assumption, that is Rs 48 to 72 lakh of fee income a year, Rs 57.6 lakh at Rs 1.2 lakh.</a:t>
+              <a:t>Since 80 percent of those who accept join, 60 fewer acceptances are 48 fewer students, and the joiners counted directly say the same: 288 last cycle, 240 this cycle. At a first-year fee of Rs 1 to 1.5 lakh, an assumption, that is Rs 48 to 72 lakh of first-year fees, Rs 57.6 lakh at Rs 1.2 lakh. The no-show, sized the same way: if half of the 200 sat the test and passed on at this cycle's rates, an assumption, about 30 more would join. That gain is worth planning for, and it is how the test has always run; the 48 is a loss that started this cycle.</a:t>
             </a:r>
           </a:p>
         </p:txBody>
@@ -24682,8 +24727,8 @@
         </p:nvSpPr>
         <p:spPr>
           <a:xfrm>
-            <a:off x="530352" y="5014467"/>
-            <a:ext cx="11130991" cy="962152"/>
+            <a:off x="530352" y="5179568"/>
+            <a:ext cx="11130991" cy="890016"/>
           </a:xfrm>
           <a:prstGeom prst="roundRect">
             <a:avLst>
@@ -24734,7 +24779,7 @@
         </p:nvSpPr>
         <p:spPr>
           <a:xfrm>
-            <a:off x="713232" y="5142483"/>
+            <a:off x="713232" y="5307584"/>
             <a:ext cx="91440" cy="91440"/>
           </a:xfrm>
           <a:prstGeom prst="ellipse">
@@ -24778,7 +24823,7 @@
         </p:nvSpPr>
         <p:spPr>
           <a:xfrm>
-            <a:off x="868680" y="5142483"/>
+            <a:off x="868680" y="5307584"/>
             <a:ext cx="91440" cy="91440"/>
           </a:xfrm>
           <a:prstGeom prst="ellipse">
@@ -24822,7 +24867,7 @@
         </p:nvSpPr>
         <p:spPr>
           <a:xfrm>
-            <a:off x="1024128" y="5142483"/>
+            <a:off x="1024128" y="5307584"/>
             <a:ext cx="91440" cy="91440"/>
           </a:xfrm>
           <a:prstGeom prst="ellipse">
@@ -24866,8 +24911,8 @@
         </p:nvSpPr>
         <p:spPr>
           <a:xfrm>
-            <a:off x="804671" y="5343652"/>
-            <a:ext cx="10673791" cy="559816"/>
+            <a:off x="804671" y="5508752"/>
+            <a:ext cx="10673791" cy="487679"/>
           </a:xfrm>
           <a:prstGeom prst="rect">
             <a:avLst/>
@@ -24886,13 +24931,13 @@
               </a:spcAft>
             </a:pPr>
             <a:r>
-              <a:rPr sz="1400" b="0" i="0">
+              <a:rPr sz="1200" b="0" i="0">
                 <a:solidFill>
                   <a:srgbClr val="E4E1F1"/>
                 </a:solidFill>
                 <a:latin typeface="Consolas"/>
               </a:rPr>
-              <a:t>lost = (shortlisted * last_cycle_rate - accepted).round()   # 5 in-state, 55 other states</a:t>
+              <a:t>lost = shortlisted * accepted_last / shortlisted_last - accepted   # 230 - 225 = 5; 130 - 75 = 55</a:t>
             </a:r>
           </a:p>
           <a:p>
@@ -24902,13 +24947,13 @@
               </a:spcAft>
             </a:pPr>
             <a:r>
-              <a:rPr sz="1400" b="0" i="0">
+              <a:rPr sz="1200" b="0" i="0">
                 <a:solidFill>
                   <a:srgbClr val="E4E1F1"/>
                 </a:solidFill>
                 <a:latin typeface="Consolas"/>
               </a:rPr>
-              <a:t>joiners_lost = lost.sum() * 0.8                              # 48; 288 - 240 says the same</a:t>
+              <a:t>joiners_lost = lost.sum() * 0.8                                    # 48; 288 - 240 says the same</a:t>
             </a:r>
           </a:p>
         </p:txBody>
@@ -26302,7 +26347,7 @@
         </p:nvSpPr>
         <p:spPr>
           <a:xfrm>
-            <a:off x="530352" y="1920240"/>
+            <a:off x="530352" y="1855724"/>
             <a:ext cx="502920" cy="300735"/>
           </a:xfrm>
           <a:prstGeom prst="rect">
@@ -26337,7 +26382,163 @@
         </p:nvSpPr>
         <p:spPr>
           <a:xfrm>
-            <a:off x="1097280" y="1956816"/>
+            <a:off x="1097280" y="1892300"/>
+            <a:ext cx="10564063" cy="558800"/>
+          </a:xfrm>
+          <a:prstGeom prst="rect">
+            <a:avLst/>
+          </a:prstGeom>
+          <a:noFill/>
+        </p:spPr>
+        <p:txBody>
+          <a:bodyPr wrap="square" anchor="t" lIns="0" rIns="0" tIns="0" bIns="0">
+            <a:spAutoFit/>
+          </a:bodyPr>
+          <a:lstStyle/>
+          <a:p>
+            <a:r>
+              <a:rPr sz="1300" b="1" i="0">
+                <a:solidFill>
+                  <a:srgbClr val="1A1440"/>
+                </a:solidFill>
+                <a:latin typeface="Calibri"/>
+              </a:rPr>
+              <a:t>The call.</a:t>
+            </a:r>
+            <a:r>
+              <a:rPr sz="1300" b="0" i="0">
+                <a:solidFill>
+                  <a:srgbClr val="1A1440"/>
+                </a:solidFill>
+                <a:latin typeface="Calibri"/>
+              </a:rPr>
+              <a:t> Give other-state offers their 21-day fee deadline back in the next round, a cheap change that can be undone; the test's no-show waits, since it never moved.</a:t>
+            </a:r>
+          </a:p>
+        </p:txBody>
+      </p:sp>
+      <p:sp>
+        <p:nvSpPr>
+          <p:cNvPr id="11" name="TextBox 10"/>
+          <p:cNvSpPr txBox="1"/>
+          <p:nvPr/>
+        </p:nvSpPr>
+        <p:spPr>
+          <a:xfrm>
+            <a:off x="530352" y="2487676"/>
+            <a:ext cx="502920" cy="300735"/>
+          </a:xfrm>
+          <a:prstGeom prst="rect">
+            <a:avLst/>
+          </a:prstGeom>
+          <a:noFill/>
+        </p:spPr>
+        <p:txBody>
+          <a:bodyPr wrap="square" anchor="t" lIns="0" rIns="0" tIns="0" bIns="0">
+            <a:spAutoFit/>
+          </a:bodyPr>
+          <a:lstStyle/>
+          <a:p>
+            <a:pPr algn="l"/>
+            <a:r>
+              <a:rPr sz="1600" b="0" i="0">
+                <a:solidFill>
+                  <a:srgbClr val="5B3FD6"/>
+                </a:solidFill>
+                <a:latin typeface="Georgia"/>
+              </a:rPr>
+              <a:t>02</a:t>
+            </a:r>
+          </a:p>
+        </p:txBody>
+      </p:sp>
+      <p:sp>
+        <p:nvSpPr>
+          <p:cNvPr id="12" name="TextBox 11"/>
+          <p:cNvSpPr txBox="1"/>
+          <p:nvPr/>
+        </p:nvSpPr>
+        <p:spPr>
+          <a:xfrm>
+            <a:off x="1097280" y="2524252"/>
+            <a:ext cx="10564063" cy="558800"/>
+          </a:xfrm>
+          <a:prstGeom prst="rect">
+            <a:avLst/>
+          </a:prstGeom>
+          <a:noFill/>
+        </p:spPr>
+        <p:txBody>
+          <a:bodyPr wrap="square" anchor="t" lIns="0" rIns="0" tIns="0" bIns="0">
+            <a:spAutoFit/>
+          </a:bodyPr>
+          <a:lstStyle/>
+          <a:p>
+            <a:r>
+              <a:rPr sz="1300" b="1" i="0">
+                <a:solidFill>
+                  <a:srgbClr val="1A1440"/>
+                </a:solidFill>
+                <a:latin typeface="Calibri"/>
+              </a:rPr>
+              <a:t>The evidence.</a:t>
+            </a:r>
+            <a:r>
+              <a:rPr sz="1300" b="0" i="0">
+                <a:solidFill>
+                  <a:srgbClr val="1A1440"/>
+                </a:solidFill>
+                <a:latin typeface="Calibri"/>
+              </a:rPr>
+              <a:t> Offer acceptance fell from 90 to 75 percent; for other-state students from 87 to 50, while in-state held at 92 to 90 on the same step, from the cycle the deadline went from 21 to 7 days.</a:t>
+            </a:r>
+          </a:p>
+        </p:txBody>
+      </p:sp>
+      <p:sp>
+        <p:nvSpPr>
+          <p:cNvPr id="13" name="TextBox 12"/>
+          <p:cNvSpPr txBox="1"/>
+          <p:nvPr/>
+        </p:nvSpPr>
+        <p:spPr>
+          <a:xfrm>
+            <a:off x="530352" y="3119628"/>
+            <a:ext cx="502920" cy="300735"/>
+          </a:xfrm>
+          <a:prstGeom prst="rect">
+            <a:avLst/>
+          </a:prstGeom>
+          <a:noFill/>
+        </p:spPr>
+        <p:txBody>
+          <a:bodyPr wrap="square" anchor="t" lIns="0" rIns="0" tIns="0" bIns="0">
+            <a:spAutoFit/>
+          </a:bodyPr>
+          <a:lstStyle/>
+          <a:p>
+            <a:pPr algn="l"/>
+            <a:r>
+              <a:rPr sz="1600" b="0" i="0">
+                <a:solidFill>
+                  <a:srgbClr val="5B3FD6"/>
+                </a:solidFill>
+                <a:latin typeface="Georgia"/>
+              </a:rPr>
+              <a:t>03</a:t>
+            </a:r>
+          </a:p>
+        </p:txBody>
+      </p:sp>
+      <p:sp>
+        <p:nvSpPr>
+          <p:cNvPr id="14" name="TextBox 13"/>
+          <p:cNvSpPr txBox="1"/>
+          <p:nvPr/>
+        </p:nvSpPr>
+        <p:spPr>
+          <a:xfrm>
+            <a:off x="1097280" y="3156204"/>
             <a:ext cx="10564063" cy="334264"/>
           </a:xfrm>
           <a:prstGeom prst="rect">
@@ -26358,7 +26559,7 @@
                 </a:solidFill>
                 <a:latin typeface="Calibri"/>
               </a:rPr>
-              <a:t>The call.</a:t>
+              <a:t>The cost.</a:t>
             </a:r>
             <a:r>
               <a:rPr sz="1300" b="0" i="0">
@@ -26367,20 +26568,20 @@
                 </a:solidFill>
                 <a:latin typeface="Calibri"/>
               </a:rPr>
-              <a:t> Give other-state offers a longer fee deadline first; the test's no-show waits, since it never moved.</a:t>
-            </a:r>
-          </a:p>
-        </p:txBody>
-      </p:sp>
-      <p:sp>
-        <p:nvSpPr>
-          <p:cNvPr id="11" name="TextBox 10"/>
-          <p:cNvSpPr txBox="1"/>
-          <p:nvPr/>
-        </p:nvSpPr>
-        <p:spPr>
-          <a:xfrm>
-            <a:off x="530352" y="2327656"/>
+              <a:t> 60 fewer acceptances, 48 fewer students, Rs 48 to 72 lakh of first-year fees at an assumed Rs 1 to 1.5 lakh.</a:t>
+            </a:r>
+          </a:p>
+        </p:txBody>
+      </p:sp>
+      <p:sp>
+        <p:nvSpPr>
+          <p:cNvPr id="15" name="TextBox 14"/>
+          <p:cNvSpPr txBox="1"/>
+          <p:nvPr/>
+        </p:nvSpPr>
+        <p:spPr>
+          <a:xfrm>
+            <a:off x="530352" y="3527044"/>
             <a:ext cx="502920" cy="300735"/>
           </a:xfrm>
           <a:prstGeom prst="rect">
@@ -26402,20 +26603,20 @@
                 </a:solidFill>
                 <a:latin typeface="Georgia"/>
               </a:rPr>
-              <a:t>02</a:t>
-            </a:r>
-          </a:p>
-        </p:txBody>
-      </p:sp>
-      <p:sp>
-        <p:nvSpPr>
-          <p:cNvPr id="12" name="TextBox 11"/>
-          <p:cNvSpPr txBox="1"/>
-          <p:nvPr/>
-        </p:nvSpPr>
-        <p:spPr>
-          <a:xfrm>
-            <a:off x="1097280" y="2364232"/>
+              <a:t>04</a:t>
+            </a:r>
+          </a:p>
+        </p:txBody>
+      </p:sp>
+      <p:sp>
+        <p:nvSpPr>
+          <p:cNvPr id="16" name="TextBox 15"/>
+          <p:cNvSpPr txBox="1"/>
+          <p:nvPr/>
+        </p:nvSpPr>
+        <p:spPr>
+          <a:xfrm>
+            <a:off x="1097280" y="3563620"/>
             <a:ext cx="10564063" cy="558800"/>
           </a:xfrm>
           <a:prstGeom prst="rect">
@@ -26436,7 +26637,7 @@
                 </a:solidFill>
                 <a:latin typeface="Calibri"/>
               </a:rPr>
-              <a:t>The evidence.</a:t>
+              <a:t>The objection.</a:t>
             </a:r>
             <a:r>
               <a:rPr sz="1300" b="0" i="0">
@@ -26445,20 +26646,20 @@
                 </a:solidFill>
                 <a:latin typeface="Calibri"/>
               </a:rPr>
-              <a:t> Offer acceptance fell from 90 to 75 percent; for other-state students from 87 to 50, while in-state held at 92 to 90 on the same step, from the cycle the deadline went from 21 to 7 days.</a:t>
-            </a:r>
-          </a:p>
-        </p:txBody>
-      </p:sp>
-      <p:sp>
-        <p:nvSpPr>
-          <p:cNvPr id="13" name="TextBox 12"/>
-          <p:cNvSpPr txBox="1"/>
-          <p:nvPr/>
-        </p:nvSpPr>
-        <p:spPr>
-          <a:xfrm>
-            <a:off x="530352" y="2959608"/>
+              <a:t> Offers did go out in two days, which is true; the fall came after the offer, for one group, after one change.</a:t>
+            </a:r>
+          </a:p>
+        </p:txBody>
+      </p:sp>
+      <p:sp>
+        <p:nvSpPr>
+          <p:cNvPr id="17" name="TextBox 16"/>
+          <p:cNvSpPr txBox="1"/>
+          <p:nvPr/>
+        </p:nvSpPr>
+        <p:spPr>
+          <a:xfrm>
+            <a:off x="530352" y="4158996"/>
             <a:ext cx="502920" cy="300735"/>
           </a:xfrm>
           <a:prstGeom prst="rect">
@@ -26480,162 +26681,6 @@
                 </a:solidFill>
                 <a:latin typeface="Georgia"/>
               </a:rPr>
-              <a:t>03</a:t>
-            </a:r>
-          </a:p>
-        </p:txBody>
-      </p:sp>
-      <p:sp>
-        <p:nvSpPr>
-          <p:cNvPr id="14" name="TextBox 13"/>
-          <p:cNvSpPr txBox="1"/>
-          <p:nvPr/>
-        </p:nvSpPr>
-        <p:spPr>
-          <a:xfrm>
-            <a:off x="1097280" y="2996184"/>
-            <a:ext cx="10564063" cy="334264"/>
-          </a:xfrm>
-          <a:prstGeom prst="rect">
-            <a:avLst/>
-          </a:prstGeom>
-          <a:noFill/>
-        </p:spPr>
-        <p:txBody>
-          <a:bodyPr wrap="square" anchor="t" lIns="0" rIns="0" tIns="0" bIns="0">
-            <a:spAutoFit/>
-          </a:bodyPr>
-          <a:lstStyle/>
-          <a:p>
-            <a:r>
-              <a:rPr sz="1300" b="1" i="0">
-                <a:solidFill>
-                  <a:srgbClr val="1A1440"/>
-                </a:solidFill>
-                <a:latin typeface="Calibri"/>
-              </a:rPr>
-              <a:t>The cost.</a:t>
-            </a:r>
-            <a:r>
-              <a:rPr sz="1300" b="0" i="0">
-                <a:solidFill>
-                  <a:srgbClr val="1A1440"/>
-                </a:solidFill>
-                <a:latin typeface="Calibri"/>
-              </a:rPr>
-              <a:t> 60 fewer acceptances, 48 fewer students, Rs 48 to 72 lakh of first-year fees at an assumed Rs 1 to 1.5 lakh.</a:t>
-            </a:r>
-          </a:p>
-        </p:txBody>
-      </p:sp>
-      <p:sp>
-        <p:nvSpPr>
-          <p:cNvPr id="15" name="TextBox 14"/>
-          <p:cNvSpPr txBox="1"/>
-          <p:nvPr/>
-        </p:nvSpPr>
-        <p:spPr>
-          <a:xfrm>
-            <a:off x="530352" y="3367024"/>
-            <a:ext cx="502920" cy="300735"/>
-          </a:xfrm>
-          <a:prstGeom prst="rect">
-            <a:avLst/>
-          </a:prstGeom>
-          <a:noFill/>
-        </p:spPr>
-        <p:txBody>
-          <a:bodyPr wrap="square" anchor="t" lIns="0" rIns="0" tIns="0" bIns="0">
-            <a:spAutoFit/>
-          </a:bodyPr>
-          <a:lstStyle/>
-          <a:p>
-            <a:pPr algn="l"/>
-            <a:r>
-              <a:rPr sz="1600" b="0" i="0">
-                <a:solidFill>
-                  <a:srgbClr val="5B3FD6"/>
-                </a:solidFill>
-                <a:latin typeface="Georgia"/>
-              </a:rPr>
-              <a:t>04</a:t>
-            </a:r>
-          </a:p>
-        </p:txBody>
-      </p:sp>
-      <p:sp>
-        <p:nvSpPr>
-          <p:cNvPr id="16" name="TextBox 15"/>
-          <p:cNvSpPr txBox="1"/>
-          <p:nvPr/>
-        </p:nvSpPr>
-        <p:spPr>
-          <a:xfrm>
-            <a:off x="1097280" y="3403600"/>
-            <a:ext cx="10564063" cy="558800"/>
-          </a:xfrm>
-          <a:prstGeom prst="rect">
-            <a:avLst/>
-          </a:prstGeom>
-          <a:noFill/>
-        </p:spPr>
-        <p:txBody>
-          <a:bodyPr wrap="square" anchor="t" lIns="0" rIns="0" tIns="0" bIns="0">
-            <a:spAutoFit/>
-          </a:bodyPr>
-          <a:lstStyle/>
-          <a:p>
-            <a:r>
-              <a:rPr sz="1300" b="1" i="0">
-                <a:solidFill>
-                  <a:srgbClr val="1A1440"/>
-                </a:solidFill>
-                <a:latin typeface="Calibri"/>
-              </a:rPr>
-              <a:t>The objection.</a:t>
-            </a:r>
-            <a:r>
-              <a:rPr sz="1300" b="0" i="0">
-                <a:solidFill>
-                  <a:srgbClr val="1A1440"/>
-                </a:solidFill>
-                <a:latin typeface="Calibri"/>
-              </a:rPr>
-              <a:t> Offers did go out in two days, which is true; the fall came after the offer, for one group, after one change.</a:t>
-            </a:r>
-          </a:p>
-        </p:txBody>
-      </p:sp>
-      <p:sp>
-        <p:nvSpPr>
-          <p:cNvPr id="17" name="TextBox 16"/>
-          <p:cNvSpPr txBox="1"/>
-          <p:nvPr/>
-        </p:nvSpPr>
-        <p:spPr>
-          <a:xfrm>
-            <a:off x="530352" y="3998976"/>
-            <a:ext cx="502920" cy="300735"/>
-          </a:xfrm>
-          <a:prstGeom prst="rect">
-            <a:avLst/>
-          </a:prstGeom>
-          <a:noFill/>
-        </p:spPr>
-        <p:txBody>
-          <a:bodyPr wrap="square" anchor="t" lIns="0" rIns="0" tIns="0" bIns="0">
-            <a:spAutoFit/>
-          </a:bodyPr>
-          <a:lstStyle/>
-          <a:p>
-            <a:pPr algn="l"/>
-            <a:r>
-              <a:rPr sz="1600" b="0" i="0">
-                <a:solidFill>
-                  <a:srgbClr val="5B3FD6"/>
-                </a:solidFill>
-                <a:latin typeface="Georgia"/>
-              </a:rPr>
               <a:t>05</a:t>
             </a:r>
           </a:p>
@@ -26649,7 +26694,7 @@
         </p:nvSpPr>
         <p:spPr>
           <a:xfrm>
-            <a:off x="1097280" y="4035552"/>
+            <a:off x="1097280" y="4195572"/>
             <a:ext cx="10564063" cy="558800"/>
           </a:xfrm>
           <a:prstGeom prst="rect">
@@ -26692,7 +26737,7 @@
         </p:nvSpPr>
         <p:spPr>
           <a:xfrm>
-            <a:off x="530352" y="4777232"/>
+            <a:off x="530352" y="4937252"/>
             <a:ext cx="11130991" cy="1052576"/>
           </a:xfrm>
           <a:prstGeom prst="roundRect">
@@ -26746,7 +26791,7 @@
         </p:nvSpPr>
         <p:spPr>
           <a:xfrm>
-            <a:off x="758952" y="5074920"/>
+            <a:off x="758952" y="5234940"/>
             <a:ext cx="457200" cy="457200"/>
           </a:xfrm>
           <a:prstGeom prst="ellipse">
@@ -26798,7 +26843,7 @@
         </p:blipFill>
         <p:spPr>
           <a:xfrm>
-            <a:off x="868680" y="5184648"/>
+            <a:off x="868680" y="5344668"/>
             <a:ext cx="237744" cy="237744"/>
           </a:xfrm>
           <a:prstGeom prst="rect">
@@ -26814,7 +26859,7 @@
         </p:nvSpPr>
         <p:spPr>
           <a:xfrm>
-            <a:off x="1399031" y="4923536"/>
+            <a:off x="1399031" y="5083556"/>
             <a:ext cx="9987991" cy="160401"/>
           </a:xfrm>
           <a:prstGeom prst="rect">
@@ -26849,7 +26894,7 @@
         </p:nvSpPr>
         <p:spPr>
           <a:xfrm>
-            <a:off x="1399031" y="5142992"/>
+            <a:off x="1399031" y="5303012"/>
             <a:ext cx="9987991" cy="613664"/>
           </a:xfrm>
           <a:prstGeom prst="rect">

--- a/content/W04/D4/slides/C2_W04_D04_half2_STUDENT.pptx
+++ b/content/W04/D4/slides/C2_W04_D04_half2_STUDENT.pptx
@@ -1099,7 +1099,7 @@
           <a:lstStyle/>
           <a:p>
             <a:r>
-              <a:t>LIVE, 10 minutes. L6. Pairs work from S79's table only: one asks the question, one answers in the</a:t>
+              <a:t>LIVE, 10 minutes. L6. If late: S80 read in two sentences. Pairs work from S79's table only: one asks the question, one answers in the</a:t>
             </a:r>
           </a:p>
           <a:p>
